--- a/WSR-Template.pptx
+++ b/WSR-Template.pptx
@@ -251,7 +251,7 @@
           <a:p>
             <a:fld id="{846CE7D5-CF57-46EF-B807-FDD0502418D4}" type="datetimeFigureOut">
               <a:rPr lang="en-US" smtClean="0"/>
-              <a:t>6/16/2026</a:t>
+              <a:t>6/17/2026</a:t>
             </a:fld>
             <a:endParaRPr lang="en-US"/>
           </a:p>
@@ -421,7 +421,7 @@
           <a:p>
             <a:fld id="{846CE7D5-CF57-46EF-B807-FDD0502418D4}" type="datetimeFigureOut">
               <a:rPr lang="en-US" smtClean="0"/>
-              <a:t>6/16/2026</a:t>
+              <a:t>6/17/2026</a:t>
             </a:fld>
             <a:endParaRPr lang="en-US"/>
           </a:p>
@@ -601,7 +601,7 @@
           <a:p>
             <a:fld id="{846CE7D5-CF57-46EF-B807-FDD0502418D4}" type="datetimeFigureOut">
               <a:rPr lang="en-US" smtClean="0"/>
-              <a:t>6/16/2026</a:t>
+              <a:t>6/17/2026</a:t>
             </a:fld>
             <a:endParaRPr lang="en-US"/>
           </a:p>
@@ -771,7 +771,7 @@
           <a:p>
             <a:fld id="{846CE7D5-CF57-46EF-B807-FDD0502418D4}" type="datetimeFigureOut">
               <a:rPr lang="en-US" smtClean="0"/>
-              <a:t>6/16/2026</a:t>
+              <a:t>6/17/2026</a:t>
             </a:fld>
             <a:endParaRPr lang="en-US"/>
           </a:p>
@@ -1017,7 +1017,7 @@
           <a:p>
             <a:fld id="{846CE7D5-CF57-46EF-B807-FDD0502418D4}" type="datetimeFigureOut">
               <a:rPr lang="en-US" smtClean="0"/>
-              <a:t>6/16/2026</a:t>
+              <a:t>6/17/2026</a:t>
             </a:fld>
             <a:endParaRPr lang="en-US"/>
           </a:p>
@@ -1249,7 +1249,7 @@
           <a:p>
             <a:fld id="{846CE7D5-CF57-46EF-B807-FDD0502418D4}" type="datetimeFigureOut">
               <a:rPr lang="en-US" smtClean="0"/>
-              <a:t>6/16/2026</a:t>
+              <a:t>6/17/2026</a:t>
             </a:fld>
             <a:endParaRPr lang="en-US"/>
           </a:p>
@@ -1616,7 +1616,7 @@
           <a:p>
             <a:fld id="{846CE7D5-CF57-46EF-B807-FDD0502418D4}" type="datetimeFigureOut">
               <a:rPr lang="en-US" smtClean="0"/>
-              <a:t>6/16/2026</a:t>
+              <a:t>6/17/2026</a:t>
             </a:fld>
             <a:endParaRPr lang="en-US"/>
           </a:p>
@@ -1734,7 +1734,7 @@
           <a:p>
             <a:fld id="{846CE7D5-CF57-46EF-B807-FDD0502418D4}" type="datetimeFigureOut">
               <a:rPr lang="en-US" smtClean="0"/>
-              <a:t>6/16/2026</a:t>
+              <a:t>6/17/2026</a:t>
             </a:fld>
             <a:endParaRPr lang="en-US"/>
           </a:p>
@@ -1829,7 +1829,7 @@
           <a:p>
             <a:fld id="{846CE7D5-CF57-46EF-B807-FDD0502418D4}" type="datetimeFigureOut">
               <a:rPr lang="en-US" smtClean="0"/>
-              <a:t>6/16/2026</a:t>
+              <a:t>6/17/2026</a:t>
             </a:fld>
             <a:endParaRPr lang="en-US"/>
           </a:p>
@@ -2106,7 +2106,7 @@
           <a:p>
             <a:fld id="{846CE7D5-CF57-46EF-B807-FDD0502418D4}" type="datetimeFigureOut">
               <a:rPr lang="en-US" smtClean="0"/>
-              <a:t>6/16/2026</a:t>
+              <a:t>6/17/2026</a:t>
             </a:fld>
             <a:endParaRPr lang="en-US"/>
           </a:p>
@@ -2363,7 +2363,7 @@
           <a:p>
             <a:fld id="{846CE7D5-CF57-46EF-B807-FDD0502418D4}" type="datetimeFigureOut">
               <a:rPr lang="en-US" smtClean="0"/>
-              <a:t>6/16/2026</a:t>
+              <a:t>6/17/2026</a:t>
             </a:fld>
             <a:endParaRPr lang="en-US"/>
           </a:p>
@@ -2576,7 +2576,7 @@
           <a:p>
             <a:fld id="{846CE7D5-CF57-46EF-B807-FDD0502418D4}" type="datetimeFigureOut">
               <a:rPr lang="en-US" smtClean="0"/>
-              <a:t>6/16/2026</a:t>
+              <a:t>6/17/2026</a:t>
             </a:fld>
             <a:endParaRPr lang="en-US"/>
           </a:p>
@@ -3340,13 +3340,13 @@
               </a:spcBef>
             </a:pPr>
             <a:r>
-              <a:rPr lang="en-US" sz="1400">
+              <a:rPr lang="en-US" sz="1800" dirty="0">
                 <a:solidFill>
                   <a:schemeClr val="accent1"/>
                 </a:solidFill>
                 <a:latin typeface="Graphik"/>
               </a:rPr>
-              <a:t>XYZ – TEAM NAME</a:t>
+              <a:t>$TEAM_NAME</a:t>
             </a:r>
           </a:p>
         </p:txBody>
@@ -3365,8 +3365,8 @@
         </p:nvSpPr>
         <p:spPr>
           <a:xfrm>
-            <a:off x="382947" y="3805916"/>
-            <a:ext cx="6428896" cy="1593560"/>
+            <a:off x="382947" y="3859704"/>
+            <a:ext cx="6401475" cy="1593560"/>
           </a:xfrm>
           <a:prstGeom prst="rect">
             <a:avLst/>
@@ -3678,7 +3678,7 @@
               <a:defRPr/>
             </a:pPr>
             <a:r>
-              <a:rPr kumimoji="0" lang="en-US" sz="1050" b="1" i="0" u="none" strike="noStrike" kern="1200" cap="none" spc="0" normalizeH="0" baseline="0" noProof="0">
+              <a:rPr kumimoji="0" lang="en-US" sz="1050" b="1" i="0" u="none" strike="noStrike" kern="1200" cap="none" spc="0" normalizeH="0" baseline="0" noProof="0" dirty="0">
                 <a:ln>
                   <a:noFill/>
                 </a:ln>
@@ -3695,7 +3695,7 @@
               <a:t>Accenture Dev Lead</a:t>
             </a:r>
             <a:r>
-              <a:rPr kumimoji="0" lang="en-US" sz="1050" b="0" i="0" u="none" strike="noStrike" kern="1200" cap="none" spc="0" normalizeH="0" baseline="0" noProof="0">
+              <a:rPr kumimoji="0" lang="en-US" sz="1050" b="0" i="0" u="none" strike="noStrike" kern="1200" cap="none" spc="0" normalizeH="0" baseline="0" noProof="0" dirty="0">
                 <a:ln>
                   <a:noFill/>
                 </a:ln>
@@ -3712,16 +3712,16 @@
               <a:t>: </a:t>
             </a:r>
             <a:r>
-              <a:rPr lang="en-US" sz="1050">
+              <a:rPr lang="en-US" sz="1050" dirty="0">
                 <a:solidFill>
                   <a:prstClr val="black"/>
                 </a:solidFill>
                 <a:latin typeface="Calibri" panose="020F0502020204030204"/>
                 <a:cs typeface="Calibri"/>
               </a:rPr>
-              <a:t>             XYZ</a:t>
-            </a:r>
-            <a:endParaRPr lang="en-IN" sz="1050">
+              <a:t>             $ACC_LEAD</a:t>
+            </a:r>
+            <a:endParaRPr lang="en-IN" sz="1050" dirty="0">
               <a:latin typeface="Aptos"/>
               <a:ea typeface="Calibri"/>
               <a:cs typeface="Calibri"/>
@@ -3732,7 +3732,7 @@
               <a:defRPr/>
             </a:pPr>
             <a:r>
-              <a:rPr lang="en-US" sz="1100" b="1">
+              <a:rPr lang="en-US" sz="1100" b="1" dirty="0">
                 <a:solidFill>
                   <a:prstClr val="black"/>
                 </a:solidFill>
@@ -3742,7 +3742,7 @@
               <a:t>Optum Dev Lead</a:t>
             </a:r>
             <a:r>
-              <a:rPr kumimoji="0" lang="en-US" sz="1100" b="0" i="0" u="none" strike="noStrike" kern="1200" cap="none" spc="0" normalizeH="0" baseline="0" noProof="0">
+              <a:rPr kumimoji="0" lang="en-US" sz="1100" b="0" i="0" u="none" strike="noStrike" kern="1200" cap="none" spc="0" normalizeH="0" baseline="0" noProof="0" dirty="0">
                 <a:ln>
                   <a:noFill/>
                 </a:ln>
@@ -3759,7 +3759,7 @@
               <a:t>:</a:t>
             </a:r>
             <a:r>
-              <a:rPr lang="en-US" sz="1100">
+              <a:rPr lang="en-US" sz="1100" dirty="0">
                 <a:solidFill>
                   <a:prstClr val="black"/>
                 </a:solidFill>
@@ -3769,10 +3769,16 @@
               <a:t>                  </a:t>
             </a:r>
             <a:r>
-              <a:rPr lang="en-IN" sz="1100"/>
-              <a:t>XYZ</a:t>
-            </a:r>
-            <a:endParaRPr lang="en-IN" sz="1100">
+              <a:rPr lang="en-IN" sz="1100" dirty="0">
+                <a:solidFill>
+                  <a:prstClr val="black"/>
+                </a:solidFill>
+                <a:latin typeface="Calibri" panose="020F0502020204030204"/>
+                <a:cs typeface="Calibri"/>
+              </a:rPr>
+              <a:t>$CLIENT_LEAD</a:t>
+            </a:r>
+            <a:endParaRPr lang="en-IN" sz="1100" dirty="0">
               <a:latin typeface="Aptos"/>
               <a:ea typeface="Calibri"/>
               <a:cs typeface="Calibri"/>
@@ -3783,7 +3789,7 @@
               <a:defRPr/>
             </a:pPr>
             <a:r>
-              <a:rPr lang="en-US" sz="1100" b="1">
+              <a:rPr lang="en-US" sz="1100" b="1" dirty="0">
                 <a:solidFill>
                   <a:prstClr val="black"/>
                 </a:solidFill>
@@ -3793,7 +3799,7 @@
               <a:t>Optum Product Owner</a:t>
             </a:r>
             <a:r>
-              <a:rPr kumimoji="0" lang="en-US" sz="1100" i="0" u="none" strike="noStrike" kern="1200" cap="none" spc="0" normalizeH="0" baseline="0" noProof="0">
+              <a:rPr kumimoji="0" lang="en-US" sz="1100" i="0" u="none" strike="noStrike" kern="1200" cap="none" spc="0" normalizeH="0" baseline="0" noProof="0" dirty="0">
                 <a:ln>
                   <a:noFill/>
                 </a:ln>
@@ -3810,16 +3816,16 @@
               <a:t>:</a:t>
             </a:r>
             <a:r>
-              <a:rPr lang="en-US" sz="1100">
+              <a:rPr lang="en-US" sz="1100" dirty="0">
                 <a:solidFill>
                   <a:prstClr val="black"/>
                 </a:solidFill>
                 <a:latin typeface="Calibri" panose="020F0502020204030204"/>
                 <a:cs typeface="Calibri"/>
               </a:rPr>
-              <a:t>       XYZ</a:t>
-            </a:r>
-            <a:endParaRPr lang="en-IN" sz="1100">
+              <a:t>       $CLIENT_PO</a:t>
+            </a:r>
+            <a:endParaRPr lang="en-IN" sz="1100" dirty="0">
               <a:solidFill>
                 <a:prstClr val="black"/>
               </a:solidFill>
@@ -3850,7 +3856,7 @@
               <a:t>Accenture Team members:</a:t>
             </a:r>
             <a:r>
-              <a:rPr kumimoji="0" lang="en-US" sz="1050" b="0" i="0" u="none" strike="noStrike" kern="1200" cap="none" spc="0" normalizeH="0" baseline="0" noProof="0">
+              <a:rPr kumimoji="0" lang="en-US" sz="1050" b="0" i="0" u="none" strike="noStrike" kern="1200" cap="none" spc="0" normalizeH="0" baseline="0" noProof="0" dirty="0">
                 <a:ln>
                   <a:noFill/>
                 </a:ln>
@@ -3867,16 +3873,16 @@
               <a:t> </a:t>
             </a:r>
             <a:r>
-              <a:rPr lang="en-US" sz="1050">
+              <a:rPr lang="en-US" sz="1050" dirty="0">
                 <a:solidFill>
                   <a:prstClr val="black"/>
                 </a:solidFill>
                 <a:latin typeface="Calibri" panose="020F0502020204030204"/>
                 <a:cs typeface="Calibri"/>
               </a:rPr>
-              <a:t>  N Devs</a:t>
-            </a:r>
-            <a:endParaRPr lang="en-US" sz="1050" b="0" i="0" u="none" strike="noStrike" kern="1200" cap="none" spc="0" normalizeH="0" baseline="0" noProof="0">
+              <a:t>  $ACC_DEV_COUNT Devs</a:t>
+            </a:r>
+            <a:endParaRPr lang="en-US" sz="1050" b="0" i="0" u="none" strike="noStrike" kern="1200" cap="none" spc="0" normalizeH="0" baseline="0" noProof="0" dirty="0">
               <a:ln>
                 <a:noFill/>
               </a:ln>
@@ -4207,7 +4213,7 @@
         </p:nvSpPr>
         <p:spPr>
           <a:xfrm>
-            <a:off x="366020" y="738264"/>
+            <a:off x="366020" y="711370"/>
             <a:ext cx="4045857" cy="259235"/>
           </a:xfrm>
           <a:prstGeom prst="rect">
@@ -4421,7 +4427,7 @@
               <a:t>Delivery Progress Tracker</a:t>
             </a:r>
             <a:r>
-              <a:rPr kumimoji="0" lang="en-US" sz="1400" b="0" i="0" u="none" strike="noStrike" kern="1200" cap="none" spc="0" normalizeH="0" baseline="0" noProof="0">
+              <a:rPr kumimoji="0" lang="en-US" sz="1400" b="0" i="0" u="none" strike="noStrike" kern="1200" cap="none" spc="0" normalizeH="0" baseline="0" noProof="0" dirty="0">
                 <a:ln>
                   <a:noFill/>
                 </a:ln>
@@ -4435,9 +4441,9 @@
                 <a:ea typeface="+mn-ea"/>
                 <a:cs typeface="+mn-cs"/>
               </a:rPr>
-              <a:t> as of </a:t>
-            </a:r>
-            <a:endParaRPr lang="en-US">
+              <a:t> as of $DATE </a:t>
+            </a:r>
+            <a:endParaRPr lang="en-US" dirty="0">
               <a:solidFill>
                 <a:prstClr val="black"/>
               </a:solidFill>
@@ -4598,7 +4604,7 @@
               <a:defRPr/>
             </a:pPr>
             <a:r>
-              <a:rPr lang="en-US" sz="900" b="1">
+              <a:rPr lang="en-US" sz="900" b="1" dirty="0">
                 <a:solidFill>
                   <a:srgbClr val="DCAFFF">
                     <a:lumMod val="50000"/>
@@ -4665,7 +4671,7 @@
               </a:rPr>
             </a:br>
             <a:r>
-              <a:rPr lang="en-US" sz="900" b="1">
+              <a:rPr lang="en-US" sz="900" b="1" dirty="0">
                 <a:solidFill>
                   <a:srgbClr val="DCAFFF">
                     <a:lumMod val="50000"/>
@@ -4675,7 +4681,7 @@
               </a:rPr>
               <a:t>Upcoming Holiday():</a:t>
             </a:r>
-            <a:endParaRPr lang="en-US" sz="1100">
+            <a:endParaRPr lang="en-US" sz="1100" dirty="0">
               <a:solidFill>
                 <a:schemeClr val="tx1"/>
               </a:solidFill>
@@ -4853,14 +4859,14 @@
           <p:nvPr>
             <p:extLst>
               <p:ext uri="{D42A27DB-BD31-4B8C-83A1-F6EECF244321}">
-                <p14:modId xmlns:p14="http://schemas.microsoft.com/office/powerpoint/2010/main" val="103633475"/>
+                <p14:modId xmlns:p14="http://schemas.microsoft.com/office/powerpoint/2010/main" val="1049854098"/>
               </p:ext>
             </p:extLst>
           </p:nvPr>
         </p:nvGraphicFramePr>
         <p:xfrm>
           <a:off x="367812" y="1118747"/>
-          <a:ext cx="11620500" cy="1689735"/>
+          <a:ext cx="11620500" cy="1252418"/>
         </p:xfrm>
         <a:graphic>
           <a:graphicData uri="http://schemas.openxmlformats.org/drawingml/2006/table">
@@ -5189,234 +5195,7 @@
                   </a:ext>
                 </a:extLst>
               </a:tr>
-              <a:tr h="285750">
-                <a:tc>
-                  <a:txBody>
-                    <a:bodyPr/>
-                    <a:lstStyle/>
-                    <a:p>
-                      <a:pPr fontAlgn="ctr">
-                        <a:buNone/>
-                      </a:pPr>
-                      <a:endParaRPr lang="en-US">
-                        <a:effectLst/>
-                      </a:endParaRPr>
-                    </a:p>
-                  </a:txBody>
-                  <a:tcPr anchor="ctr">
-                    <a:lnL w="9525" cap="flat" cmpd="sng" algn="ctr">
-                      <a:solidFill>
-                        <a:srgbClr val="BFBFBF"/>
-                      </a:solidFill>
-                      <a:prstDash val="solid"/>
-                      <a:round/>
-                      <a:headEnd type="none" w="med" len="med"/>
-                      <a:tailEnd type="none" w="med" len="med"/>
-                    </a:lnL>
-                    <a:lnR w="9525" cap="flat" cmpd="sng" algn="ctr">
-                      <a:solidFill>
-                        <a:srgbClr val="BFBFBF"/>
-                      </a:solidFill>
-                      <a:prstDash val="solid"/>
-                      <a:round/>
-                      <a:headEnd type="none" w="med" len="med"/>
-                      <a:tailEnd type="none" w="med" len="med"/>
-                    </a:lnR>
-                    <a:lnT w="9525" cap="flat" cmpd="sng" algn="ctr">
-                      <a:solidFill>
-                        <a:srgbClr val="BFBFBF"/>
-                      </a:solidFill>
-                      <a:prstDash val="solid"/>
-                      <a:round/>
-                      <a:headEnd type="none" w="med" len="med"/>
-                      <a:tailEnd type="none" w="med" len="med"/>
-                    </a:lnT>
-                    <a:lnB w="9525" cap="flat" cmpd="sng" algn="ctr">
-                      <a:solidFill>
-                        <a:srgbClr val="BFBFBF"/>
-                      </a:solidFill>
-                      <a:prstDash val="solid"/>
-                      <a:round/>
-                      <a:headEnd type="none" w="med" len="med"/>
-                      <a:tailEnd type="none" w="med" len="med"/>
-                    </a:lnB>
-                    <a:solidFill>
-                      <a:srgbClr val="F2E6FF"/>
-                    </a:solidFill>
-                  </a:tcPr>
-                </a:tc>
-                <a:tc>
-                  <a:txBody>
-                    <a:bodyPr/>
-                    <a:lstStyle/>
-                    <a:p>
-                      <a:pPr fontAlgn="ctr">
-                        <a:buNone/>
-                      </a:pPr>
-                      <a:endParaRPr lang="en-US">
-                        <a:effectLst/>
-                      </a:endParaRPr>
-                    </a:p>
-                  </a:txBody>
-                  <a:tcPr anchor="ctr">
-                    <a:lnL w="9525" cap="flat" cmpd="sng" algn="ctr">
-                      <a:solidFill>
-                        <a:srgbClr val="BFBFBF"/>
-                      </a:solidFill>
-                      <a:prstDash val="solid"/>
-                      <a:round/>
-                      <a:headEnd type="none" w="med" len="med"/>
-                      <a:tailEnd type="none" w="med" len="med"/>
-                    </a:lnL>
-                    <a:lnR w="9525" cap="flat" cmpd="sng" algn="ctr">
-                      <a:solidFill>
-                        <a:srgbClr val="BFBFBF"/>
-                      </a:solidFill>
-                      <a:prstDash val="solid"/>
-                      <a:round/>
-                      <a:headEnd type="none" w="med" len="med"/>
-                      <a:tailEnd type="none" w="med" len="med"/>
-                    </a:lnR>
-                    <a:lnT w="9525" cap="flat" cmpd="sng" algn="ctr">
-                      <a:solidFill>
-                        <a:srgbClr val="BFBFBF"/>
-                      </a:solidFill>
-                      <a:prstDash val="solid"/>
-                      <a:round/>
-                      <a:headEnd type="none" w="med" len="med"/>
-                      <a:tailEnd type="none" w="med" len="med"/>
-                    </a:lnT>
-                    <a:lnB w="9525" cap="flat" cmpd="sng" algn="ctr">
-                      <a:solidFill>
-                        <a:srgbClr val="BFBFBF"/>
-                      </a:solidFill>
-                      <a:prstDash val="solid"/>
-                      <a:round/>
-                      <a:headEnd type="none" w="med" len="med"/>
-                      <a:tailEnd type="none" w="med" len="med"/>
-                    </a:lnB>
-                    <a:solidFill>
-                      <a:srgbClr val="F2E6FF"/>
-                    </a:solidFill>
-                  </a:tcPr>
-                </a:tc>
-                <a:tc>
-                  <a:txBody>
-                    <a:bodyPr/>
-                    <a:lstStyle/>
-                    <a:p>
-                      <a:pPr fontAlgn="ctr">
-                        <a:buNone/>
-                      </a:pPr>
-                      <a:endParaRPr lang="en-US">
-                        <a:effectLst/>
-                      </a:endParaRPr>
-                    </a:p>
-                  </a:txBody>
-                  <a:tcPr anchor="ctr">
-                    <a:lnL w="9525" cap="flat" cmpd="sng" algn="ctr">
-                      <a:solidFill>
-                        <a:srgbClr val="BFBFBF"/>
-                      </a:solidFill>
-                      <a:prstDash val="solid"/>
-                      <a:round/>
-                      <a:headEnd type="none" w="med" len="med"/>
-                      <a:tailEnd type="none" w="med" len="med"/>
-                    </a:lnL>
-                    <a:lnR w="9525" cap="flat" cmpd="sng" algn="ctr">
-                      <a:solidFill>
-                        <a:srgbClr val="BFBFBF"/>
-                      </a:solidFill>
-                      <a:prstDash val="solid"/>
-                      <a:round/>
-                      <a:headEnd type="none" w="med" len="med"/>
-                      <a:tailEnd type="none" w="med" len="med"/>
-                    </a:lnR>
-                    <a:lnT w="9525" cap="flat" cmpd="sng" algn="ctr">
-                      <a:solidFill>
-                        <a:srgbClr val="BFBFBF"/>
-                      </a:solidFill>
-                      <a:prstDash val="solid"/>
-                      <a:round/>
-                      <a:headEnd type="none" w="med" len="med"/>
-                      <a:tailEnd type="none" w="med" len="med"/>
-                    </a:lnT>
-                    <a:lnB w="9525" cap="flat" cmpd="sng" algn="ctr">
-                      <a:solidFill>
-                        <a:srgbClr val="BFBFBF"/>
-                      </a:solidFill>
-                      <a:prstDash val="solid"/>
-                      <a:round/>
-                      <a:headEnd type="none" w="med" len="med"/>
-                      <a:tailEnd type="none" w="med" len="med"/>
-                    </a:lnB>
-                    <a:solidFill>
-                      <a:srgbClr val="F2E6FF"/>
-                    </a:solidFill>
-                  </a:tcPr>
-                </a:tc>
-                <a:tc>
-                  <a:txBody>
-                    <a:bodyPr/>
-                    <a:lstStyle/>
-                    <a:p>
-                      <a:pPr fontAlgn="ctr">
-                        <a:buNone/>
-                      </a:pPr>
-                      <a:endParaRPr lang="en-US">
-                        <a:effectLst/>
-                      </a:endParaRPr>
-                    </a:p>
-                  </a:txBody>
-                  <a:tcPr anchor="ctr">
-                    <a:lnL w="9525" cap="flat" cmpd="sng" algn="ctr">
-                      <a:solidFill>
-                        <a:srgbClr val="BFBFBF"/>
-                      </a:solidFill>
-                      <a:prstDash val="solid"/>
-                      <a:round/>
-                      <a:headEnd type="none" w="med" len="med"/>
-                      <a:tailEnd type="none" w="med" len="med"/>
-                    </a:lnL>
-                    <a:lnR w="9525" cap="flat" cmpd="sng" algn="ctr">
-                      <a:solidFill>
-                        <a:srgbClr val="BFBFBF"/>
-                      </a:solidFill>
-                      <a:prstDash val="solid"/>
-                      <a:round/>
-                      <a:headEnd type="none" w="med" len="med"/>
-                      <a:tailEnd type="none" w="med" len="med"/>
-                    </a:lnR>
-                    <a:lnT w="9525" cap="flat" cmpd="sng" algn="ctr">
-                      <a:solidFill>
-                        <a:srgbClr val="BFBFBF"/>
-                      </a:solidFill>
-                      <a:prstDash val="solid"/>
-                      <a:round/>
-                      <a:headEnd type="none" w="med" len="med"/>
-                      <a:tailEnd type="none" w="med" len="med"/>
-                    </a:lnT>
-                    <a:lnB w="9525" cap="flat" cmpd="sng" algn="ctr">
-                      <a:solidFill>
-                        <a:srgbClr val="BFBFBF"/>
-                      </a:solidFill>
-                      <a:prstDash val="solid"/>
-                      <a:round/>
-                      <a:headEnd type="none" w="med" len="med"/>
-                      <a:tailEnd type="none" w="med" len="med"/>
-                    </a:lnB>
-                    <a:solidFill>
-                      <a:srgbClr val="F2E6FF"/>
-                    </a:solidFill>
-                  </a:tcPr>
-                </a:tc>
-                <a:extLst>
-                  <a:ext uri="{0D108BD9-81ED-4DB2-BD59-A6C34878D82A}">
-                    <a16:rowId xmlns:a16="http://schemas.microsoft.com/office/drawing/2014/main" val="3027785633"/>
-                  </a:ext>
-                </a:extLst>
-              </a:tr>
-              <a:tr h="428625">
+              <a:tr h="357068">
                 <a:tc>
                   <a:txBody>
                     <a:bodyPr/>
@@ -6198,14 +5977,14 @@
           <p:nvPr>
             <p:extLst>
               <p:ext uri="{D42A27DB-BD31-4B8C-83A1-F6EECF244321}">
-                <p14:modId xmlns:p14="http://schemas.microsoft.com/office/powerpoint/2010/main" val="2284577248"/>
+                <p14:modId xmlns:p14="http://schemas.microsoft.com/office/powerpoint/2010/main" val="1099161087"/>
               </p:ext>
             </p:extLst>
           </p:nvPr>
         </p:nvGraphicFramePr>
         <p:xfrm>
-          <a:off x="6848841" y="2809595"/>
-          <a:ext cx="5153025" cy="3801711"/>
+          <a:off x="6848841" y="2419632"/>
+          <a:ext cx="5153025" cy="4057398"/>
         </p:xfrm>
         <a:graphic>
           <a:graphicData uri="http://schemas.openxmlformats.org/drawingml/2006/table">
@@ -6214,21 +5993,21 @@
                 <a:tableStyleId>{5C22544A-7EE6-4342-B048-85BDC9FD1C3A}</a:tableStyleId>
               </a:tblPr>
               <a:tblGrid>
-                <a:gridCol w="2524125">
+                <a:gridCol w="2443077">
                   <a:extLst>
                     <a:ext uri="{9D8B030D-6E8A-4147-A177-3AD203B41FA5}">
                       <a16:colId xmlns:a16="http://schemas.microsoft.com/office/drawing/2014/main" val="3593015306"/>
                     </a:ext>
                   </a:extLst>
                 </a:gridCol>
-                <a:gridCol w="1028700">
+                <a:gridCol w="1008529">
                   <a:extLst>
                     <a:ext uri="{9D8B030D-6E8A-4147-A177-3AD203B41FA5}">
                       <a16:colId xmlns:a16="http://schemas.microsoft.com/office/drawing/2014/main" val="3286052154"/>
                     </a:ext>
                   </a:extLst>
                 </a:gridCol>
-                <a:gridCol w="885825">
+                <a:gridCol w="987044">
                   <a:extLst>
                     <a:ext uri="{9D8B030D-6E8A-4147-A177-3AD203B41FA5}">
                       <a16:colId xmlns:a16="http://schemas.microsoft.com/office/drawing/2014/main" val="2538154191"/>
@@ -6243,7 +6022,7 @@
                   </a:extLst>
                 </a:gridCol>
               </a:tblGrid>
-              <a:tr h="363572">
+              <a:tr h="382650">
                 <a:tc>
                   <a:txBody>
                     <a:bodyPr/>
@@ -6252,7 +6031,7 @@
                       <a:pPr fontAlgn="t">
                         <a:buNone/>
                       </a:pPr>
-                      <a:endParaRPr lang="en-US">
+                      <a:endParaRPr lang="en-US" dirty="0">
                         <a:effectLst/>
                       </a:endParaRPr>
                     </a:p>
@@ -6311,16 +6090,16 @@
                         <a:buNone/>
                       </a:pPr>
                       <a:r>
-                        <a:rPr lang="en-US" sz="1050" b="0" i="0" u="none" strike="noStrike">
+                        <a:rPr lang="en-US" sz="1050" b="0" i="0" u="none" strike="noStrike" dirty="0">
                           <a:solidFill>
                             <a:srgbClr val="FFFFFF"/>
                           </a:solidFill>
                           <a:effectLst/>
                           <a:latin typeface="Calibri"/>
                         </a:rPr>
-                        <a:t>Sprint 20</a:t>
+                        <a:t>$SPRINT_N</a:t>
                       </a:r>
-                      <a:endParaRPr lang="en-US" b="0" i="0">
+                      <a:endParaRPr lang="en-US" b="0" i="0" dirty="0">
                         <a:solidFill>
                           <a:srgbClr val="000000"/>
                         </a:solidFill>
@@ -6329,10 +6108,14 @@
                     </a:p>
                   </a:txBody>
                   <a:tcPr marL="6343" marR="6343" marT="6343" anchor="ctr">
-                    <a:lnL w="9524">
-                      <a:solidFill>
-                        <a:srgbClr val="FFFFFF"/>
-                      </a:solidFill>
+                    <a:lnL w="9525" cap="flat" cmpd="sng" algn="ctr">
+                      <a:solidFill>
+                        <a:srgbClr val="FFFFFF"/>
+                      </a:solidFill>
+                      <a:prstDash val="solid"/>
+                      <a:round/>
+                      <a:headEnd type="none" w="med" len="med"/>
+                      <a:tailEnd type="none" w="med" len="med"/>
                     </a:lnL>
                     <a:lnR w="9524">
                       <a:solidFill>
@@ -6366,16 +6149,16 @@
                         <a:buNone/>
                       </a:pPr>
                       <a:r>
-                        <a:rPr lang="en-US" sz="1050" b="0" i="0" u="none" strike="noStrike">
+                        <a:rPr lang="en-US" sz="1050" b="0" i="0" u="none" strike="noStrike" dirty="0">
                           <a:solidFill>
                             <a:srgbClr val="FFFFFF"/>
                           </a:solidFill>
                           <a:effectLst/>
                           <a:latin typeface="Calibri" panose="020F0502020204030204" pitchFamily="34" charset="0"/>
                         </a:rPr>
-                        <a:t>Sprint 20</a:t>
+                        <a:t>$SPRINT_N1</a:t>
                       </a:r>
-                      <a:endParaRPr lang="en-US" b="0" i="0">
+                      <a:endParaRPr lang="en-US" b="0" i="0" dirty="0">
                         <a:solidFill>
                           <a:srgbClr val="000000"/>
                         </a:solidFill>
@@ -6384,7 +6167,7 @@
                     </a:p>
                   </a:txBody>
                   <a:tcPr marL="6344" marR="6344" marT="6344" anchor="ctr">
-                    <a:lnL w="9525" cap="flat" cmpd="sng" algn="ctr">
+                    <a:lnL w="9524" cap="flat" cmpd="sng" algn="ctr">
                       <a:solidFill>
                         <a:srgbClr val="FFFFFF"/>
                       </a:solidFill>
@@ -6437,16 +6220,16 @@
                         <a:buNone/>
                       </a:pPr>
                       <a:r>
-                        <a:rPr lang="en-US" sz="1050" b="0" i="0" u="none" strike="noStrike">
+                        <a:rPr lang="en-US" sz="1050" b="0" i="0" u="none" strike="noStrike" dirty="0">
                           <a:solidFill>
                             <a:srgbClr val="FFFFFF"/>
                           </a:solidFill>
                           <a:effectLst/>
                           <a:latin typeface="Calibri" panose="020F0502020204030204" pitchFamily="34" charset="0"/>
                         </a:rPr>
-                        <a:t>Sprint 19</a:t>
+                        <a:t>$SPRINT_N2</a:t>
                       </a:r>
-                      <a:endParaRPr lang="en-US" b="0" i="0">
+                      <a:endParaRPr lang="en-US" b="0" i="0" dirty="0">
                         <a:solidFill>
                           <a:srgbClr val="000000"/>
                         </a:solidFill>
@@ -6502,7 +6285,7 @@
                   </a:ext>
                 </a:extLst>
               </a:tr>
-              <a:tr h="255846">
+              <a:tr h="267660">
                 <a:tc>
                   <a:txBody>
                     <a:bodyPr/>
@@ -6515,7 +6298,7 @@
                         <a:buNone/>
                       </a:pPr>
                       <a:r>
-                        <a:rPr lang="en-US" sz="1050" b="0" i="0">
+                        <a:rPr lang="en-US" sz="1050" b="0" i="0" dirty="0">
                           <a:solidFill>
                             <a:srgbClr val="000000"/>
                           </a:solidFill>
@@ -6524,7 +6307,7 @@
                         </a:rPr>
                         <a:t>Planned Velocity </a:t>
                       </a:r>
-                      <a:endParaRPr lang="en-US" b="0" i="0">
+                      <a:endParaRPr lang="en-US" b="0" i="0" dirty="0">
                         <a:solidFill>
                           <a:srgbClr val="000000"/>
                         </a:solidFill>
@@ -6585,25 +6368,38 @@
                         </a:lnSpc>
                         <a:buNone/>
                       </a:pPr>
-                      <a:endParaRPr lang="en-US" sz="1050" b="0" i="0" u="none" strike="noStrike" dirty="0">
-                        <a:solidFill>
-                          <a:srgbClr val="000000"/>
-                        </a:solidFill>
-                        <a:effectLst/>
-                        <a:latin typeface="Graphik"/>
-                      </a:endParaRPr>
+                      <a:r>
+                        <a:rPr lang="en-US" sz="1050" b="0" i="0" u="none" strike="noStrike" dirty="0">
+                          <a:solidFill>
+                            <a:srgbClr val="000000"/>
+                          </a:solidFill>
+                          <a:effectLst/>
+                          <a:latin typeface="Calibri" panose="020F0502020204030204" pitchFamily="34" charset="0"/>
+                          <a:ea typeface="Calibri" panose="020F0502020204030204" pitchFamily="34" charset="0"/>
+                          <a:cs typeface="Calibri" panose="020F0502020204030204" pitchFamily="34" charset="0"/>
+                        </a:rPr>
+                        <a:t>$N_PV</a:t>
+                      </a:r>
                     </a:p>
                   </a:txBody>
                   <a:tcPr marL="6343" marR="6343" marT="6343" anchor="ctr">
-                    <a:lnL w="9524">
-                      <a:solidFill>
-                        <a:srgbClr val="FFFFFF"/>
-                      </a:solidFill>
+                    <a:lnL w="9525" cap="flat" cmpd="sng" algn="ctr">
+                      <a:solidFill>
+                        <a:srgbClr val="FFFFFF"/>
+                      </a:solidFill>
+                      <a:prstDash val="solid"/>
+                      <a:round/>
+                      <a:headEnd type="none" w="med" len="med"/>
+                      <a:tailEnd type="none" w="med" len="med"/>
                     </a:lnL>
-                    <a:lnR w="9524">
-                      <a:solidFill>
-                        <a:srgbClr val="FFFFFF"/>
-                      </a:solidFill>
+                    <a:lnR w="9524" cap="flat" cmpd="sng" algn="ctr">
+                      <a:solidFill>
+                        <a:srgbClr val="FFFFFF"/>
+                      </a:solidFill>
+                      <a:prstDash val="solid"/>
+                      <a:round/>
+                      <a:headEnd type="none" w="med" len="med"/>
+                      <a:tailEnd type="none" w="med" len="med"/>
                     </a:lnR>
                     <a:lnT w="19678">
                       <a:solidFill>
@@ -6625,23 +6421,28 @@
                     <a:bodyPr/>
                     <a:lstStyle/>
                     <a:p>
-                      <a:pPr marL="0" indent="0" algn="ctr" fontAlgn="base">
+                      <a:pPr marL="0" lvl="0" indent="0" algn="ctr">
                         <a:lnSpc>
                           <a:spcPts val="1275"/>
                         </a:lnSpc>
                         <a:buNone/>
                       </a:pPr>
-                      <a:endParaRPr lang="en-US" sz="1050" b="0" i="0" u="none" strike="noStrike" dirty="0">
-                        <a:solidFill>
-                          <a:srgbClr val="000000"/>
-                        </a:solidFill>
-                        <a:effectLst/>
-                        <a:latin typeface="Graphik"/>
-                      </a:endParaRPr>
+                      <a:r>
+                        <a:rPr lang="en-US" sz="1050" b="0" i="0" u="none" strike="noStrike" dirty="0">
+                          <a:solidFill>
+                            <a:srgbClr val="000000"/>
+                          </a:solidFill>
+                          <a:effectLst/>
+                          <a:latin typeface="Calibri" panose="020F0502020204030204" pitchFamily="34" charset="0"/>
+                          <a:ea typeface="Calibri" panose="020F0502020204030204" pitchFamily="34" charset="0"/>
+                          <a:cs typeface="Calibri" panose="020F0502020204030204" pitchFamily="34" charset="0"/>
+                        </a:rPr>
+                        <a:t>$N1_PV</a:t>
+                      </a:r>
                     </a:p>
                   </a:txBody>
-                  <a:tcPr marL="6344" marR="6344" marT="6344" anchor="ctr">
-                    <a:lnL w="9525" cap="flat" cmpd="sng" algn="ctr">
+                  <a:tcPr marL="6343" marR="6343" marT="6343" anchor="ctr">
+                    <a:lnL w="9524" cap="flat" cmpd="sng" algn="ctr">
                       <a:solidFill>
                         <a:srgbClr val="FFFFFF"/>
                       </a:solidFill>
@@ -6687,22 +6488,27 @@
                     <a:bodyPr/>
                     <a:lstStyle/>
                     <a:p>
-                      <a:pPr marL="0" indent="0" algn="ctr" fontAlgn="base">
+                      <a:pPr marL="0" lvl="0" indent="0" algn="ctr">
                         <a:lnSpc>
                           <a:spcPts val="1275"/>
                         </a:lnSpc>
                         <a:buNone/>
                       </a:pPr>
-                      <a:endParaRPr lang="en-US" sz="1050" b="0" i="0" u="none" strike="noStrike" dirty="0">
-                        <a:solidFill>
-                          <a:srgbClr val="000000"/>
-                        </a:solidFill>
-                        <a:effectLst/>
-                        <a:latin typeface="Graphik"/>
-                      </a:endParaRPr>
+                      <a:r>
+                        <a:rPr lang="en-US" sz="1050" b="0" i="0" u="none" strike="noStrike" dirty="0">
+                          <a:solidFill>
+                            <a:srgbClr val="000000"/>
+                          </a:solidFill>
+                          <a:effectLst/>
+                          <a:latin typeface="Calibri" panose="020F0502020204030204" pitchFamily="34" charset="0"/>
+                          <a:ea typeface="Calibri" panose="020F0502020204030204" pitchFamily="34" charset="0"/>
+                          <a:cs typeface="Calibri" panose="020F0502020204030204" pitchFamily="34" charset="0"/>
+                        </a:rPr>
+                        <a:t>$N2_PV</a:t>
+                      </a:r>
                     </a:p>
                   </a:txBody>
-                  <a:tcPr marL="6344" marR="6344" marT="6344" anchor="ctr">
+                  <a:tcPr marL="6343" marR="6343" marT="6343" anchor="ctr">
                     <a:lnL w="9525" cap="flat" cmpd="sng" algn="ctr">
                       <a:solidFill>
                         <a:srgbClr val="FFFFFF"/>
@@ -6750,7 +6556,7 @@
                   </a:ext>
                 </a:extLst>
               </a:tr>
-              <a:tr h="323175">
+              <a:tr h="338098">
                 <a:tc>
                   <a:txBody>
                     <a:bodyPr/>
@@ -6763,7 +6569,7 @@
                         <a:buNone/>
                       </a:pPr>
                       <a:r>
-                        <a:rPr lang="en-US" sz="1050" b="0" i="0">
+                        <a:rPr lang="en-US" sz="1050" b="0" i="0" dirty="0">
                           <a:solidFill>
                             <a:srgbClr val="000000"/>
                           </a:solidFill>
@@ -6772,7 +6578,7 @@
                         </a:rPr>
                         <a:t>Accepted Velocity </a:t>
                       </a:r>
-                      <a:endParaRPr lang="en-US" b="0" i="0">
+                      <a:endParaRPr lang="en-US" b="0" i="0" dirty="0">
                         <a:solidFill>
                           <a:srgbClr val="000000"/>
                         </a:solidFill>
@@ -6827,24 +6633,53 @@
                     <a:bodyPr/>
                     <a:lstStyle/>
                     <a:p>
-                      <a:pPr lvl="0">
+                      <a:pPr marL="0" marR="0" lvl="0" indent="0" algn="ctr" defTabSz="914400" rtl="0" eaLnBrk="1" fontAlgn="auto" latinLnBrk="0" hangingPunct="1">
+                        <a:lnSpc>
+                          <a:spcPct val="100000"/>
+                        </a:lnSpc>
+                        <a:spcBef>
+                          <a:spcPts val="0"/>
+                        </a:spcBef>
+                        <a:spcAft>
+                          <a:spcPts val="0"/>
+                        </a:spcAft>
+                        <a:buClrTx/>
+                        <a:buSzTx/>
+                        <a:buFontTx/>
                         <a:buNone/>
+                        <a:tabLst/>
+                        <a:defRPr/>
                       </a:pPr>
-                      <a:endParaRPr lang="en-US" dirty="0">
-                        <a:effectLst/>
-                      </a:endParaRPr>
+                      <a:r>
+                        <a:rPr lang="en-US" sz="1050" b="0" i="0" u="none" strike="noStrike" dirty="0">
+                          <a:solidFill>
+                            <a:srgbClr val="000000"/>
+                          </a:solidFill>
+                          <a:effectLst/>
+                          <a:latin typeface="Graphik"/>
+                        </a:rPr>
+                        <a:t>$N_AV</a:t>
+                      </a:r>
                     </a:p>
                   </a:txBody>
                   <a:tcPr marL="6343" marR="6343" marT="6343" anchor="ctr">
-                    <a:lnL w="9524">
-                      <a:solidFill>
-                        <a:srgbClr val="FFFFFF"/>
-                      </a:solidFill>
+                    <a:lnL w="9525" cap="flat" cmpd="sng" algn="ctr">
+                      <a:solidFill>
+                        <a:srgbClr val="FFFFFF"/>
+                      </a:solidFill>
+                      <a:prstDash val="solid"/>
+                      <a:round/>
+                      <a:headEnd type="none" w="med" len="med"/>
+                      <a:tailEnd type="none" w="med" len="med"/>
                     </a:lnL>
-                    <a:lnR w="9524">
-                      <a:solidFill>
-                        <a:srgbClr val="FFFFFF"/>
-                      </a:solidFill>
+                    <a:lnR w="9524" cap="flat" cmpd="sng" algn="ctr">
+                      <a:solidFill>
+                        <a:srgbClr val="FFFFFF"/>
+                      </a:solidFill>
+                      <a:prstDash val="solid"/>
+                      <a:round/>
+                      <a:headEnd type="none" w="med" len="med"/>
+                      <a:tailEnd type="none" w="med" len="med"/>
                     </a:lnR>
                     <a:lnT w="9524">
                       <a:solidFill>
@@ -6866,23 +6701,37 @@
                     <a:bodyPr/>
                     <a:lstStyle/>
                     <a:p>
-                      <a:pPr marL="0" indent="0" algn="ctr" fontAlgn="base">
+                      <a:pPr marL="0" marR="0" lvl="0" indent="0" algn="ctr" defTabSz="914400" rtl="0" eaLnBrk="1" fontAlgn="auto" latinLnBrk="0" hangingPunct="1">
                         <a:lnSpc>
-                          <a:spcPts val="1275"/>
+                          <a:spcPct val="100000"/>
                         </a:lnSpc>
+                        <a:spcBef>
+                          <a:spcPts val="0"/>
+                        </a:spcBef>
+                        <a:spcAft>
+                          <a:spcPts val="0"/>
+                        </a:spcAft>
+                        <a:buClrTx/>
+                        <a:buSzTx/>
+                        <a:buFontTx/>
                         <a:buNone/>
+                        <a:tabLst/>
+                        <a:defRPr/>
                       </a:pPr>
-                      <a:endParaRPr lang="en-US" sz="1050" b="0" i="0" u="none" strike="noStrike" dirty="0">
-                        <a:solidFill>
-                          <a:srgbClr val="000000"/>
-                        </a:solidFill>
-                        <a:effectLst/>
-                        <a:latin typeface="Graphik"/>
-                      </a:endParaRPr>
+                      <a:r>
+                        <a:rPr lang="en-US" sz="1050" b="0" i="0" u="none" strike="noStrike" dirty="0">
+                          <a:solidFill>
+                            <a:srgbClr val="000000"/>
+                          </a:solidFill>
+                          <a:effectLst/>
+                          <a:latin typeface="Graphik"/>
+                        </a:rPr>
+                        <a:t>$N1_AV</a:t>
+                      </a:r>
                     </a:p>
                   </a:txBody>
-                  <a:tcPr marL="6344" marR="6344" marT="6344" anchor="ctr">
-                    <a:lnL w="9525" cap="flat" cmpd="sng" algn="ctr">
+                  <a:tcPr marL="6343" marR="6343" marT="6343" anchor="ctr">
+                    <a:lnL w="9524" cap="flat" cmpd="sng" algn="ctr">
                       <a:solidFill>
                         <a:srgbClr val="FFFFFF"/>
                       </a:solidFill>
@@ -6928,22 +6777,36 @@
                     <a:bodyPr/>
                     <a:lstStyle/>
                     <a:p>
-                      <a:pPr marL="0" indent="0" algn="ctr" fontAlgn="base">
+                      <a:pPr marL="0" marR="0" lvl="0" indent="0" algn="ctr" defTabSz="914400" rtl="0" eaLnBrk="1" fontAlgn="auto" latinLnBrk="0" hangingPunct="1">
                         <a:lnSpc>
-                          <a:spcPts val="1275"/>
+                          <a:spcPct val="100000"/>
                         </a:lnSpc>
+                        <a:spcBef>
+                          <a:spcPts val="0"/>
+                        </a:spcBef>
+                        <a:spcAft>
+                          <a:spcPts val="0"/>
+                        </a:spcAft>
+                        <a:buClrTx/>
+                        <a:buSzTx/>
+                        <a:buFontTx/>
                         <a:buNone/>
+                        <a:tabLst/>
+                        <a:defRPr/>
                       </a:pPr>
-                      <a:endParaRPr lang="en-US" sz="1050" b="0" i="0" u="none" strike="noStrike" dirty="0">
-                        <a:solidFill>
-                          <a:srgbClr val="000000"/>
-                        </a:solidFill>
-                        <a:effectLst/>
-                        <a:latin typeface="Graphik"/>
-                      </a:endParaRPr>
+                      <a:r>
+                        <a:rPr lang="en-US" sz="1050" b="0" i="0" u="none" strike="noStrike" dirty="0">
+                          <a:solidFill>
+                            <a:srgbClr val="000000"/>
+                          </a:solidFill>
+                          <a:effectLst/>
+                          <a:latin typeface="Graphik"/>
+                        </a:rPr>
+                        <a:t>$N2_AV</a:t>
+                      </a:r>
                     </a:p>
                   </a:txBody>
-                  <a:tcPr marL="6344" marR="6344" marT="6344" anchor="ctr">
+                  <a:tcPr marL="6343" marR="6343" marT="6343" anchor="ctr">
                     <a:lnL w="9525" cap="flat" cmpd="sng" algn="ctr">
                       <a:solidFill>
                         <a:srgbClr val="FFFFFF"/>
@@ -6991,7 +6854,7 @@
                   </a:ext>
                 </a:extLst>
               </a:tr>
-              <a:tr h="403968">
+              <a:tr h="436194">
                 <a:tc>
                   <a:txBody>
                     <a:bodyPr/>
@@ -7068,24 +6931,38 @@
                     <a:bodyPr/>
                     <a:lstStyle/>
                     <a:p>
-                      <a:pPr lvl="0">
+                      <a:pPr lvl="0" algn="ctr">
                         <a:buNone/>
                       </a:pPr>
-                      <a:endParaRPr lang="en-US" dirty="0">
-                        <a:effectLst/>
-                      </a:endParaRPr>
+                      <a:r>
+                        <a:rPr lang="en-US" sz="1050" dirty="0">
+                          <a:effectLst/>
+                          <a:latin typeface="Calibri" panose="020F0502020204030204" pitchFamily="34" charset="0"/>
+                          <a:ea typeface="Calibri" panose="020F0502020204030204" pitchFamily="34" charset="0"/>
+                          <a:cs typeface="Calibri" panose="020F0502020204030204" pitchFamily="34" charset="0"/>
+                        </a:rPr>
+                        <a:t>$N_VR</a:t>
+                      </a:r>
                     </a:p>
                   </a:txBody>
                   <a:tcPr marL="6343" marR="6343" marT="6343" anchor="ctr">
-                    <a:lnL w="9524">
-                      <a:solidFill>
-                        <a:srgbClr val="FFFFFF"/>
-                      </a:solidFill>
+                    <a:lnL w="9525" cap="flat" cmpd="sng" algn="ctr">
+                      <a:solidFill>
+                        <a:srgbClr val="FFFFFF"/>
+                      </a:solidFill>
+                      <a:prstDash val="solid"/>
+                      <a:round/>
+                      <a:headEnd type="none" w="med" len="med"/>
+                      <a:tailEnd type="none" w="med" len="med"/>
                     </a:lnL>
-                    <a:lnR w="9524">
-                      <a:solidFill>
-                        <a:srgbClr val="FFFFFF"/>
-                      </a:solidFill>
+                    <a:lnR w="9524" cap="flat" cmpd="sng" algn="ctr">
+                      <a:solidFill>
+                        <a:srgbClr val="FFFFFF"/>
+                      </a:solidFill>
+                      <a:prstDash val="solid"/>
+                      <a:round/>
+                      <a:headEnd type="none" w="med" len="med"/>
+                      <a:tailEnd type="none" w="med" len="med"/>
                     </a:lnR>
                     <a:lnT w="9524">
                       <a:solidFill>
@@ -7107,23 +6984,22 @@
                     <a:bodyPr/>
                     <a:lstStyle/>
                     <a:p>
-                      <a:pPr marL="0" indent="0" algn="ctr" fontAlgn="base">
-                        <a:lnSpc>
-                          <a:spcPts val="1275"/>
-                        </a:lnSpc>
+                      <a:pPr lvl="0" algn="ctr">
                         <a:buNone/>
                       </a:pPr>
-                      <a:endParaRPr lang="en-US" sz="1050" b="0" i="0" u="none" strike="noStrike" dirty="0">
-                        <a:solidFill>
-                          <a:srgbClr val="000000"/>
-                        </a:solidFill>
-                        <a:effectLst/>
-                        <a:latin typeface="Graphik"/>
-                      </a:endParaRPr>
+                      <a:r>
+                        <a:rPr lang="en-US" sz="1050" dirty="0">
+                          <a:effectLst/>
+                          <a:latin typeface="Calibri" panose="020F0502020204030204" pitchFamily="34" charset="0"/>
+                          <a:ea typeface="Calibri" panose="020F0502020204030204" pitchFamily="34" charset="0"/>
+                          <a:cs typeface="Calibri" panose="020F0502020204030204" pitchFamily="34" charset="0"/>
+                        </a:rPr>
+                        <a:t>$N1_VR</a:t>
+                      </a:r>
                     </a:p>
                   </a:txBody>
-                  <a:tcPr marL="6344" marR="6344" marT="6344" anchor="ctr">
-                    <a:lnL w="9525" cap="flat" cmpd="sng" algn="ctr">
+                  <a:tcPr marL="6343" marR="6343" marT="6343" anchor="ctr">
+                    <a:lnL w="9524" cap="flat" cmpd="sng" algn="ctr">
                       <a:solidFill>
                         <a:srgbClr val="FFFFFF"/>
                       </a:solidFill>
@@ -7169,22 +7045,21 @@
                     <a:bodyPr/>
                     <a:lstStyle/>
                     <a:p>
-                      <a:pPr marL="0" indent="0" algn="ctr" fontAlgn="base">
-                        <a:lnSpc>
-                          <a:spcPts val="1275"/>
-                        </a:lnSpc>
+                      <a:pPr lvl="0" algn="ctr">
                         <a:buNone/>
                       </a:pPr>
-                      <a:endParaRPr lang="en-US" sz="1050" b="0" i="0" u="none" strike="noStrike" dirty="0">
-                        <a:solidFill>
-                          <a:srgbClr val="000000"/>
-                        </a:solidFill>
-                        <a:effectLst/>
-                        <a:latin typeface="Graphik"/>
-                      </a:endParaRPr>
+                      <a:r>
+                        <a:rPr lang="en-US" sz="1050" dirty="0">
+                          <a:effectLst/>
+                          <a:latin typeface="Calibri" panose="020F0502020204030204" pitchFamily="34" charset="0"/>
+                          <a:ea typeface="Calibri" panose="020F0502020204030204" pitchFamily="34" charset="0"/>
+                          <a:cs typeface="Calibri" panose="020F0502020204030204" pitchFamily="34" charset="0"/>
+                        </a:rPr>
+                        <a:t>$N2_VR</a:t>
+                      </a:r>
                     </a:p>
                   </a:txBody>
-                  <a:tcPr marL="6344" marR="6344" marT="6344" anchor="ctr">
+                  <a:tcPr marL="6343" marR="6343" marT="6343" anchor="ctr">
                     <a:lnL w="9525" cap="flat" cmpd="sng" algn="ctr">
                       <a:solidFill>
                         <a:srgbClr val="FFFFFF"/>
@@ -7232,7 +7107,7 @@
                   </a:ext>
                 </a:extLst>
               </a:tr>
-              <a:tr h="377037">
+              <a:tr h="394447">
                 <a:tc>
                   <a:txBody>
                     <a:bodyPr/>
@@ -7315,25 +7190,38 @@
                         </a:lnSpc>
                         <a:buNone/>
                       </a:pPr>
-                      <a:endParaRPr lang="en-US" sz="1050" b="0" i="0" u="none" strike="noStrike" dirty="0">
-                        <a:solidFill>
-                          <a:srgbClr val="000000"/>
-                        </a:solidFill>
-                        <a:effectLst/>
-                        <a:latin typeface="Graphik"/>
-                      </a:endParaRPr>
+                      <a:r>
+                        <a:rPr lang="en-US" sz="1050" b="0" i="0" u="none" strike="noStrike" dirty="0">
+                          <a:solidFill>
+                            <a:srgbClr val="000000"/>
+                          </a:solidFill>
+                          <a:effectLst/>
+                          <a:latin typeface="Calibri" panose="020F0502020204030204" pitchFamily="34" charset="0"/>
+                          <a:ea typeface="Calibri" panose="020F0502020204030204" pitchFamily="34" charset="0"/>
+                          <a:cs typeface="Calibri" panose="020F0502020204030204" pitchFamily="34" charset="0"/>
+                        </a:rPr>
+                        <a:t>$N_US</a:t>
+                      </a:r>
                     </a:p>
                   </a:txBody>
                   <a:tcPr marL="6343" marR="6343" marT="6343" anchor="ctr">
-                    <a:lnL w="9524">
-                      <a:solidFill>
-                        <a:srgbClr val="FFFFFF"/>
-                      </a:solidFill>
+                    <a:lnL w="9525" cap="flat" cmpd="sng" algn="ctr">
+                      <a:solidFill>
+                        <a:srgbClr val="FFFFFF"/>
+                      </a:solidFill>
+                      <a:prstDash val="solid"/>
+                      <a:round/>
+                      <a:headEnd type="none" w="med" len="med"/>
+                      <a:tailEnd type="none" w="med" len="med"/>
                     </a:lnL>
-                    <a:lnR w="9524">
-                      <a:solidFill>
-                        <a:srgbClr val="FFFFFF"/>
-                      </a:solidFill>
+                    <a:lnR w="9524" cap="flat" cmpd="sng" algn="ctr">
+                      <a:solidFill>
+                        <a:srgbClr val="FFFFFF"/>
+                      </a:solidFill>
+                      <a:prstDash val="solid"/>
+                      <a:round/>
+                      <a:headEnd type="none" w="med" len="med"/>
+                      <a:tailEnd type="none" w="med" len="med"/>
                     </a:lnR>
                     <a:lnT w="9524">
                       <a:solidFill>
@@ -7355,23 +7243,28 @@
                     <a:bodyPr/>
                     <a:lstStyle/>
                     <a:p>
-                      <a:pPr marL="0" indent="0" algn="ctr" fontAlgn="base">
+                      <a:pPr marL="0" lvl="0" indent="0" algn="ctr">
                         <a:lnSpc>
                           <a:spcPts val="1275"/>
                         </a:lnSpc>
                         <a:buNone/>
                       </a:pPr>
-                      <a:endParaRPr lang="en-US" sz="1050" b="0" i="0" u="none" strike="noStrike" dirty="0">
-                        <a:solidFill>
-                          <a:srgbClr val="000000"/>
-                        </a:solidFill>
-                        <a:effectLst/>
-                        <a:latin typeface="Graphik"/>
-                      </a:endParaRPr>
+                      <a:r>
+                        <a:rPr lang="en-US" sz="1050" b="0" i="0" u="none" strike="noStrike" dirty="0">
+                          <a:solidFill>
+                            <a:srgbClr val="000000"/>
+                          </a:solidFill>
+                          <a:effectLst/>
+                          <a:latin typeface="Calibri" panose="020F0502020204030204" pitchFamily="34" charset="0"/>
+                          <a:ea typeface="Calibri" panose="020F0502020204030204" pitchFamily="34" charset="0"/>
+                          <a:cs typeface="Calibri" panose="020F0502020204030204" pitchFamily="34" charset="0"/>
+                        </a:rPr>
+                        <a:t>$N1_US</a:t>
+                      </a:r>
                     </a:p>
                   </a:txBody>
-                  <a:tcPr marL="6344" marR="6344" marT="6344" anchor="ctr">
-                    <a:lnL w="9525" cap="flat" cmpd="sng" algn="ctr">
+                  <a:tcPr marL="6343" marR="6343" marT="6343" anchor="ctr">
+                    <a:lnL w="9524" cap="flat" cmpd="sng" algn="ctr">
                       <a:solidFill>
                         <a:srgbClr val="FFFFFF"/>
                       </a:solidFill>
@@ -7417,22 +7310,27 @@
                     <a:bodyPr/>
                     <a:lstStyle/>
                     <a:p>
-                      <a:pPr marL="0" indent="0" algn="ctr" fontAlgn="base">
+                      <a:pPr marL="0" lvl="0" indent="0" algn="ctr">
                         <a:lnSpc>
                           <a:spcPts val="1275"/>
                         </a:lnSpc>
                         <a:buNone/>
                       </a:pPr>
-                      <a:endParaRPr lang="en-US" sz="1050" b="0" i="0" u="none" strike="noStrike" dirty="0">
-                        <a:solidFill>
-                          <a:srgbClr val="000000"/>
-                        </a:solidFill>
-                        <a:effectLst/>
-                        <a:latin typeface="Graphik"/>
-                      </a:endParaRPr>
+                      <a:r>
+                        <a:rPr lang="en-US" sz="1050" b="0" i="0" u="none" strike="noStrike" dirty="0">
+                          <a:solidFill>
+                            <a:srgbClr val="000000"/>
+                          </a:solidFill>
+                          <a:effectLst/>
+                          <a:latin typeface="Calibri" panose="020F0502020204030204" pitchFamily="34" charset="0"/>
+                          <a:ea typeface="Calibri" panose="020F0502020204030204" pitchFamily="34" charset="0"/>
+                          <a:cs typeface="Calibri" panose="020F0502020204030204" pitchFamily="34" charset="0"/>
+                        </a:rPr>
+                        <a:t>$N2_US</a:t>
+                      </a:r>
                     </a:p>
                   </a:txBody>
-                  <a:tcPr marL="6344" marR="6344" marT="6344" anchor="ctr">
+                  <a:tcPr marL="6343" marR="6343" marT="6343" anchor="ctr">
                     <a:lnL w="9525" cap="flat" cmpd="sng" algn="ctr">
                       <a:solidFill>
                         <a:srgbClr val="FFFFFF"/>
@@ -7480,7 +7378,7 @@
                   </a:ext>
                 </a:extLst>
               </a:tr>
-              <a:tr h="377037">
+              <a:tr h="436194">
                 <a:tc>
                   <a:txBody>
                     <a:bodyPr/>
@@ -7563,25 +7461,38 @@
                         </a:lnSpc>
                         <a:buNone/>
                       </a:pPr>
-                      <a:endParaRPr lang="en-US" sz="1050" b="0" i="0" u="none" strike="noStrike" dirty="0">
-                        <a:solidFill>
-                          <a:srgbClr val="000000"/>
-                        </a:solidFill>
-                        <a:effectLst/>
-                        <a:latin typeface="Graphik"/>
-                      </a:endParaRPr>
+                      <a:r>
+                        <a:rPr lang="en-US" sz="1050" b="0" i="0" u="none" strike="noStrike" dirty="0">
+                          <a:solidFill>
+                            <a:srgbClr val="000000"/>
+                          </a:solidFill>
+                          <a:effectLst/>
+                          <a:latin typeface="Calibri" panose="020F0502020204030204" pitchFamily="34" charset="0"/>
+                          <a:ea typeface="Calibri" panose="020F0502020204030204" pitchFamily="34" charset="0"/>
+                          <a:cs typeface="Calibri" panose="020F0502020204030204" pitchFamily="34" charset="0"/>
+                        </a:rPr>
+                        <a:t>$N_DF</a:t>
+                      </a:r>
                     </a:p>
                   </a:txBody>
                   <a:tcPr marL="6343" marR="6343" marT="6343" anchor="ctr">
-                    <a:lnL w="9524">
-                      <a:solidFill>
-                        <a:srgbClr val="FFFFFF"/>
-                      </a:solidFill>
+                    <a:lnL w="9525" cap="flat" cmpd="sng" algn="ctr">
+                      <a:solidFill>
+                        <a:srgbClr val="FFFFFF"/>
+                      </a:solidFill>
+                      <a:prstDash val="solid"/>
+                      <a:round/>
+                      <a:headEnd type="none" w="med" len="med"/>
+                      <a:tailEnd type="none" w="med" len="med"/>
                     </a:lnL>
-                    <a:lnR w="9524">
-                      <a:solidFill>
-                        <a:srgbClr val="FFFFFF"/>
-                      </a:solidFill>
+                    <a:lnR w="9524" cap="flat" cmpd="sng" algn="ctr">
+                      <a:solidFill>
+                        <a:srgbClr val="FFFFFF"/>
+                      </a:solidFill>
+                      <a:prstDash val="solid"/>
+                      <a:round/>
+                      <a:headEnd type="none" w="med" len="med"/>
+                      <a:tailEnd type="none" w="med" len="med"/>
                     </a:lnR>
                     <a:lnT w="9524">
                       <a:solidFill>
@@ -7603,23 +7514,28 @@
                     <a:bodyPr/>
                     <a:lstStyle/>
                     <a:p>
-                      <a:pPr marL="0" indent="0" algn="ctr" fontAlgn="base">
+                      <a:pPr marL="0" lvl="0" indent="0" algn="ctr">
                         <a:lnSpc>
                           <a:spcPts val="1275"/>
                         </a:lnSpc>
                         <a:buNone/>
                       </a:pPr>
-                      <a:endParaRPr lang="en-US" sz="1050" b="0" i="0" u="none" strike="noStrike" dirty="0">
-                        <a:solidFill>
-                          <a:srgbClr val="000000"/>
-                        </a:solidFill>
-                        <a:effectLst/>
-                        <a:latin typeface="Graphik"/>
-                      </a:endParaRPr>
+                      <a:r>
+                        <a:rPr lang="en-US" sz="1050" b="0" i="0" u="none" strike="noStrike" dirty="0">
+                          <a:solidFill>
+                            <a:srgbClr val="000000"/>
+                          </a:solidFill>
+                          <a:effectLst/>
+                          <a:latin typeface="Calibri" panose="020F0502020204030204" pitchFamily="34" charset="0"/>
+                          <a:ea typeface="Calibri" panose="020F0502020204030204" pitchFamily="34" charset="0"/>
+                          <a:cs typeface="Calibri" panose="020F0502020204030204" pitchFamily="34" charset="0"/>
+                        </a:rPr>
+                        <a:t>$N1_DF</a:t>
+                      </a:r>
                     </a:p>
                   </a:txBody>
-                  <a:tcPr marL="6344" marR="6344" marT="6344" anchor="ctr">
-                    <a:lnL w="9525" cap="flat" cmpd="sng" algn="ctr">
+                  <a:tcPr marL="6343" marR="6343" marT="6343" anchor="ctr">
+                    <a:lnL w="9524" cap="flat" cmpd="sng" algn="ctr">
                       <a:solidFill>
                         <a:srgbClr val="FFFFFF"/>
                       </a:solidFill>
@@ -7665,22 +7581,27 @@
                     <a:bodyPr/>
                     <a:lstStyle/>
                     <a:p>
-                      <a:pPr marL="0" indent="0" algn="ctr" fontAlgn="base">
+                      <a:pPr marL="0" lvl="0" indent="0" algn="ctr">
                         <a:lnSpc>
                           <a:spcPts val="1275"/>
                         </a:lnSpc>
                         <a:buNone/>
                       </a:pPr>
-                      <a:endParaRPr lang="en-US" sz="1050" b="0" i="0" u="none" strike="noStrike" dirty="0">
-                        <a:solidFill>
-                          <a:srgbClr val="000000"/>
-                        </a:solidFill>
-                        <a:effectLst/>
-                        <a:latin typeface="Graphik"/>
-                      </a:endParaRPr>
+                      <a:r>
+                        <a:rPr lang="en-US" sz="1050" b="0" i="0" u="none" strike="noStrike" dirty="0">
+                          <a:solidFill>
+                            <a:srgbClr val="000000"/>
+                          </a:solidFill>
+                          <a:effectLst/>
+                          <a:latin typeface="Calibri" panose="020F0502020204030204" pitchFamily="34" charset="0"/>
+                          <a:ea typeface="Calibri" panose="020F0502020204030204" pitchFamily="34" charset="0"/>
+                          <a:cs typeface="Calibri" panose="020F0502020204030204" pitchFamily="34" charset="0"/>
+                        </a:rPr>
+                        <a:t>$N2_DF</a:t>
+                      </a:r>
                     </a:p>
                   </a:txBody>
-                  <a:tcPr marL="6344" marR="6344" marT="6344" anchor="ctr">
+                  <a:tcPr marL="6343" marR="6343" marT="6343" anchor="ctr">
                     <a:lnL w="9525" cap="flat" cmpd="sng" algn="ctr">
                       <a:solidFill>
                         <a:srgbClr val="FFFFFF"/>
@@ -7728,7 +7649,7 @@
                   </a:ext>
                 </a:extLst>
               </a:tr>
-              <a:tr h="377037">
+              <a:tr h="394447">
                 <a:tc>
                   <a:txBody>
                     <a:bodyPr/>
@@ -7811,25 +7732,38 @@
                         </a:lnSpc>
                         <a:buNone/>
                       </a:pPr>
-                      <a:endParaRPr lang="en-US" sz="1050" b="0" i="0" u="none" strike="noStrike" dirty="0">
-                        <a:solidFill>
-                          <a:srgbClr val="000000"/>
-                        </a:solidFill>
-                        <a:effectLst/>
-                        <a:latin typeface="Graphik"/>
-                      </a:endParaRPr>
+                      <a:r>
+                        <a:rPr lang="en-US" sz="1050" b="0" i="0" u="none" strike="noStrike" dirty="0">
+                          <a:solidFill>
+                            <a:srgbClr val="000000"/>
+                          </a:solidFill>
+                          <a:effectLst/>
+                          <a:latin typeface="Calibri" panose="020F0502020204030204" pitchFamily="34" charset="0"/>
+                          <a:ea typeface="Calibri" panose="020F0502020204030204" pitchFamily="34" charset="0"/>
+                          <a:cs typeface="Calibri" panose="020F0502020204030204" pitchFamily="34" charset="0"/>
+                        </a:rPr>
+                        <a:t>$N_DUS</a:t>
+                      </a:r>
                     </a:p>
                   </a:txBody>
                   <a:tcPr marL="6343" marR="6343" marT="6343" anchor="ctr">
-                    <a:lnL w="9524">
-                      <a:solidFill>
-                        <a:srgbClr val="FFFFFF"/>
-                      </a:solidFill>
+                    <a:lnL w="9525" cap="flat" cmpd="sng" algn="ctr">
+                      <a:solidFill>
+                        <a:srgbClr val="FFFFFF"/>
+                      </a:solidFill>
+                      <a:prstDash val="solid"/>
+                      <a:round/>
+                      <a:headEnd type="none" w="med" len="med"/>
+                      <a:tailEnd type="none" w="med" len="med"/>
                     </a:lnL>
-                    <a:lnR w="9524">
-                      <a:solidFill>
-                        <a:srgbClr val="FFFFFF"/>
-                      </a:solidFill>
+                    <a:lnR w="9524" cap="flat" cmpd="sng" algn="ctr">
+                      <a:solidFill>
+                        <a:srgbClr val="FFFFFF"/>
+                      </a:solidFill>
+                      <a:prstDash val="solid"/>
+                      <a:round/>
+                      <a:headEnd type="none" w="med" len="med"/>
+                      <a:tailEnd type="none" w="med" len="med"/>
                     </a:lnR>
                     <a:lnT w="9524">
                       <a:solidFill>
@@ -7851,23 +7785,28 @@
                     <a:bodyPr/>
                     <a:lstStyle/>
                     <a:p>
-                      <a:pPr marL="0" indent="0" algn="ctr" fontAlgn="base">
+                      <a:pPr marL="0" lvl="0" indent="0" algn="ctr">
                         <a:lnSpc>
                           <a:spcPts val="1275"/>
                         </a:lnSpc>
                         <a:buNone/>
                       </a:pPr>
-                      <a:endParaRPr lang="en-US" sz="1050" b="0" i="0" u="none" strike="noStrike" dirty="0">
-                        <a:solidFill>
-                          <a:srgbClr val="000000"/>
-                        </a:solidFill>
-                        <a:effectLst/>
-                        <a:latin typeface="Graphik"/>
-                      </a:endParaRPr>
+                      <a:r>
+                        <a:rPr lang="en-US" sz="1050" b="0" i="0" u="none" strike="noStrike" dirty="0">
+                          <a:solidFill>
+                            <a:srgbClr val="000000"/>
+                          </a:solidFill>
+                          <a:effectLst/>
+                          <a:latin typeface="Calibri" panose="020F0502020204030204" pitchFamily="34" charset="0"/>
+                          <a:ea typeface="Calibri" panose="020F0502020204030204" pitchFamily="34" charset="0"/>
+                          <a:cs typeface="Calibri" panose="020F0502020204030204" pitchFamily="34" charset="0"/>
+                        </a:rPr>
+                        <a:t>$N1_DUS</a:t>
+                      </a:r>
                     </a:p>
                   </a:txBody>
-                  <a:tcPr marL="6344" marR="6344" marT="6344" anchor="ctr">
-                    <a:lnL w="9525" cap="flat" cmpd="sng" algn="ctr">
+                  <a:tcPr marL="6343" marR="6343" marT="6343" anchor="ctr">
+                    <a:lnL w="9524" cap="flat" cmpd="sng" algn="ctr">
                       <a:solidFill>
                         <a:srgbClr val="FFFFFF"/>
                       </a:solidFill>
@@ -7913,22 +7852,27 @@
                     <a:bodyPr/>
                     <a:lstStyle/>
                     <a:p>
-                      <a:pPr marL="0" indent="0" algn="ctr" fontAlgn="base">
+                      <a:pPr marL="0" lvl="0" indent="0" algn="ctr">
                         <a:lnSpc>
                           <a:spcPts val="1275"/>
                         </a:lnSpc>
                         <a:buNone/>
                       </a:pPr>
-                      <a:endParaRPr lang="en-US" sz="1050" b="0" i="0" u="none" strike="noStrike" dirty="0">
-                        <a:solidFill>
-                          <a:srgbClr val="000000"/>
-                        </a:solidFill>
-                        <a:effectLst/>
-                        <a:latin typeface="Graphik"/>
-                      </a:endParaRPr>
+                      <a:r>
+                        <a:rPr lang="en-US" sz="1050" b="0" i="0" u="none" strike="noStrike" dirty="0">
+                          <a:solidFill>
+                            <a:srgbClr val="000000"/>
+                          </a:solidFill>
+                          <a:effectLst/>
+                          <a:latin typeface="Calibri" panose="020F0502020204030204" pitchFamily="34" charset="0"/>
+                          <a:ea typeface="Calibri" panose="020F0502020204030204" pitchFamily="34" charset="0"/>
+                          <a:cs typeface="Calibri" panose="020F0502020204030204" pitchFamily="34" charset="0"/>
+                        </a:rPr>
+                        <a:t>$N2_DUS</a:t>
+                      </a:r>
                     </a:p>
                   </a:txBody>
-                  <a:tcPr marL="6344" marR="6344" marT="6344" anchor="ctr">
+                  <a:tcPr marL="6343" marR="6343" marT="6343" anchor="ctr">
                     <a:lnL w="9525" cap="flat" cmpd="sng" algn="ctr">
                       <a:solidFill>
                         <a:srgbClr val="FFFFFF"/>
@@ -7976,7 +7920,7 @@
                   </a:ext>
                 </a:extLst>
               </a:tr>
-              <a:tr h="255846">
+              <a:tr h="267660">
                 <a:tc>
                   <a:txBody>
                     <a:bodyPr/>
@@ -8059,25 +8003,38 @@
                         </a:lnSpc>
                         <a:buNone/>
                       </a:pPr>
-                      <a:endParaRPr lang="en-US" sz="1050" b="0" i="0" u="none" strike="noStrike" dirty="0">
-                        <a:solidFill>
-                          <a:srgbClr val="000000"/>
-                        </a:solidFill>
-                        <a:effectLst/>
-                        <a:latin typeface="Graphik"/>
-                      </a:endParaRPr>
+                      <a:r>
+                        <a:rPr lang="en-US" sz="1050" b="0" i="0" u="none" strike="noStrike" dirty="0">
+                          <a:solidFill>
+                            <a:srgbClr val="000000"/>
+                          </a:solidFill>
+                          <a:effectLst/>
+                          <a:latin typeface="Calibri" panose="020F0502020204030204" pitchFamily="34" charset="0"/>
+                          <a:ea typeface="Calibri" panose="020F0502020204030204" pitchFamily="34" charset="0"/>
+                          <a:cs typeface="Calibri" panose="020F0502020204030204" pitchFamily="34" charset="0"/>
+                        </a:rPr>
+                        <a:t>$N_FDF</a:t>
+                      </a:r>
                     </a:p>
                   </a:txBody>
                   <a:tcPr marL="6343" marR="6343" marT="6343" anchor="ctr">
-                    <a:lnL w="9524">
-                      <a:solidFill>
-                        <a:srgbClr val="FFFFFF"/>
-                      </a:solidFill>
+                    <a:lnL w="9525" cap="flat" cmpd="sng" algn="ctr">
+                      <a:solidFill>
+                        <a:srgbClr val="FFFFFF"/>
+                      </a:solidFill>
+                      <a:prstDash val="solid"/>
+                      <a:round/>
+                      <a:headEnd type="none" w="med" len="med"/>
+                      <a:tailEnd type="none" w="med" len="med"/>
                     </a:lnL>
-                    <a:lnR w="9524">
-                      <a:solidFill>
-                        <a:srgbClr val="FFFFFF"/>
-                      </a:solidFill>
+                    <a:lnR w="9524" cap="flat" cmpd="sng" algn="ctr">
+                      <a:solidFill>
+                        <a:srgbClr val="FFFFFF"/>
+                      </a:solidFill>
+                      <a:prstDash val="solid"/>
+                      <a:round/>
+                      <a:headEnd type="none" w="med" len="med"/>
+                      <a:tailEnd type="none" w="med" len="med"/>
                     </a:lnR>
                     <a:lnT w="9524">
                       <a:solidFill>
@@ -8099,23 +8056,28 @@
                     <a:bodyPr/>
                     <a:lstStyle/>
                     <a:p>
-                      <a:pPr marL="0" indent="0" algn="ctr" fontAlgn="base">
+                      <a:pPr marL="0" lvl="0" indent="0" algn="ctr">
                         <a:lnSpc>
                           <a:spcPts val="1275"/>
                         </a:lnSpc>
                         <a:buNone/>
                       </a:pPr>
-                      <a:endParaRPr lang="en-US" sz="1050" b="0" i="0" u="none" strike="noStrike" dirty="0">
-                        <a:solidFill>
-                          <a:srgbClr val="000000"/>
-                        </a:solidFill>
-                        <a:effectLst/>
-                        <a:latin typeface="Graphik"/>
-                      </a:endParaRPr>
+                      <a:r>
+                        <a:rPr lang="en-US" sz="1050" b="0" i="0" u="none" strike="noStrike" dirty="0">
+                          <a:solidFill>
+                            <a:srgbClr val="000000"/>
+                          </a:solidFill>
+                          <a:effectLst/>
+                          <a:latin typeface="Calibri" panose="020F0502020204030204" pitchFamily="34" charset="0"/>
+                          <a:ea typeface="Calibri" panose="020F0502020204030204" pitchFamily="34" charset="0"/>
+                          <a:cs typeface="Calibri" panose="020F0502020204030204" pitchFamily="34" charset="0"/>
+                        </a:rPr>
+                        <a:t>$N1_FDF</a:t>
+                      </a:r>
                     </a:p>
                   </a:txBody>
-                  <a:tcPr marL="6344" marR="6344" marT="6344" anchor="ctr">
-                    <a:lnL w="9525" cap="flat" cmpd="sng" algn="ctr">
+                  <a:tcPr marL="6343" marR="6343" marT="6343" anchor="ctr">
+                    <a:lnL w="9524" cap="flat" cmpd="sng" algn="ctr">
                       <a:solidFill>
                         <a:srgbClr val="FFFFFF"/>
                       </a:solidFill>
@@ -8161,22 +8123,27 @@
                     <a:bodyPr/>
                     <a:lstStyle/>
                     <a:p>
-                      <a:pPr marL="0" indent="0" algn="ctr" fontAlgn="base">
+                      <a:pPr marL="0" lvl="0" indent="0" algn="ctr">
                         <a:lnSpc>
                           <a:spcPts val="1275"/>
                         </a:lnSpc>
                         <a:buNone/>
                       </a:pPr>
-                      <a:endParaRPr lang="en-US" sz="1050" b="0" i="0" u="none" strike="noStrike" dirty="0">
-                        <a:solidFill>
-                          <a:srgbClr val="000000"/>
-                        </a:solidFill>
-                        <a:effectLst/>
-                        <a:latin typeface="Graphik"/>
-                      </a:endParaRPr>
+                      <a:r>
+                        <a:rPr lang="en-US" sz="1050" b="0" i="0" u="none" strike="noStrike" dirty="0">
+                          <a:solidFill>
+                            <a:srgbClr val="000000"/>
+                          </a:solidFill>
+                          <a:effectLst/>
+                          <a:latin typeface="Calibri" panose="020F0502020204030204" pitchFamily="34" charset="0"/>
+                          <a:ea typeface="Calibri" panose="020F0502020204030204" pitchFamily="34" charset="0"/>
+                          <a:cs typeface="Calibri" panose="020F0502020204030204" pitchFamily="34" charset="0"/>
+                        </a:rPr>
+                        <a:t>$N2_FDF</a:t>
+                      </a:r>
                     </a:p>
                   </a:txBody>
-                  <a:tcPr marL="6344" marR="6344" marT="6344" anchor="ctr">
+                  <a:tcPr marL="6343" marR="6343" marT="6343" anchor="ctr">
                     <a:lnL w="9525" cap="flat" cmpd="sng" algn="ctr">
                       <a:solidFill>
                         <a:srgbClr val="FFFFFF"/>
@@ -8224,7 +8191,7 @@
                   </a:ext>
                 </a:extLst>
               </a:tr>
-              <a:tr h="377037">
+              <a:tr h="436194">
                 <a:tc>
                   <a:txBody>
                     <a:bodyPr/>
@@ -8307,25 +8274,38 @@
                         </a:lnSpc>
                         <a:buNone/>
                       </a:pPr>
-                      <a:endParaRPr lang="en-US" sz="1050" b="0" i="0" u="none" strike="noStrike" dirty="0">
-                        <a:solidFill>
-                          <a:srgbClr val="000000"/>
-                        </a:solidFill>
-                        <a:effectLst/>
-                        <a:latin typeface="Graphik"/>
-                      </a:endParaRPr>
+                      <a:r>
+                        <a:rPr lang="en-US" sz="1050" b="0" i="0" u="none" strike="noStrike" dirty="0">
+                          <a:solidFill>
+                            <a:srgbClr val="000000"/>
+                          </a:solidFill>
+                          <a:effectLst/>
+                          <a:latin typeface="Calibri" panose="020F0502020204030204" pitchFamily="34" charset="0"/>
+                          <a:ea typeface="Calibri" panose="020F0502020204030204" pitchFamily="34" charset="0"/>
+                          <a:cs typeface="Calibri" panose="020F0502020204030204" pitchFamily="34" charset="0"/>
+                        </a:rPr>
+                        <a:t>$N_USF</a:t>
+                      </a:r>
                     </a:p>
                   </a:txBody>
                   <a:tcPr marL="6343" marR="6343" marT="6343" anchor="ctr">
-                    <a:lnL w="9524">
-                      <a:solidFill>
-                        <a:srgbClr val="FFFFFF"/>
-                      </a:solidFill>
+                    <a:lnL w="9525" cap="flat" cmpd="sng" algn="ctr">
+                      <a:solidFill>
+                        <a:srgbClr val="FFFFFF"/>
+                      </a:solidFill>
+                      <a:prstDash val="solid"/>
+                      <a:round/>
+                      <a:headEnd type="none" w="med" len="med"/>
+                      <a:tailEnd type="none" w="med" len="med"/>
                     </a:lnL>
-                    <a:lnR w="9524">
-                      <a:solidFill>
-                        <a:srgbClr val="FFFFFF"/>
-                      </a:solidFill>
+                    <a:lnR w="9524" cap="flat" cmpd="sng" algn="ctr">
+                      <a:solidFill>
+                        <a:srgbClr val="FFFFFF"/>
+                      </a:solidFill>
+                      <a:prstDash val="solid"/>
+                      <a:round/>
+                      <a:headEnd type="none" w="med" len="med"/>
+                      <a:tailEnd type="none" w="med" len="med"/>
                     </a:lnR>
                     <a:lnT w="9524">
                       <a:solidFill>
@@ -8347,23 +8327,28 @@
                     <a:bodyPr/>
                     <a:lstStyle/>
                     <a:p>
-                      <a:pPr marL="0" indent="0" algn="ctr" fontAlgn="base">
+                      <a:pPr marL="0" lvl="0" indent="0" algn="ctr">
                         <a:lnSpc>
                           <a:spcPts val="1275"/>
                         </a:lnSpc>
                         <a:buNone/>
                       </a:pPr>
-                      <a:endParaRPr lang="en-US" sz="1050" b="0" i="0" u="none" strike="noStrike" dirty="0">
-                        <a:solidFill>
-                          <a:srgbClr val="000000"/>
-                        </a:solidFill>
-                        <a:effectLst/>
-                        <a:latin typeface="Graphik"/>
-                      </a:endParaRPr>
+                      <a:r>
+                        <a:rPr lang="en-US" sz="1050" b="0" i="0" u="none" strike="noStrike" dirty="0">
+                          <a:solidFill>
+                            <a:srgbClr val="000000"/>
+                          </a:solidFill>
+                          <a:effectLst/>
+                          <a:latin typeface="Calibri" panose="020F0502020204030204" pitchFamily="34" charset="0"/>
+                          <a:ea typeface="Calibri" panose="020F0502020204030204" pitchFamily="34" charset="0"/>
+                          <a:cs typeface="Calibri" panose="020F0502020204030204" pitchFamily="34" charset="0"/>
+                        </a:rPr>
+                        <a:t>$N1_USF</a:t>
+                      </a:r>
                     </a:p>
                   </a:txBody>
-                  <a:tcPr marL="6344" marR="6344" marT="6344" anchor="ctr">
-                    <a:lnL w="9525" cap="flat" cmpd="sng" algn="ctr">
+                  <a:tcPr marL="6343" marR="6343" marT="6343" anchor="ctr">
+                    <a:lnL w="9524" cap="flat" cmpd="sng" algn="ctr">
                       <a:solidFill>
                         <a:srgbClr val="FFFFFF"/>
                       </a:solidFill>
@@ -8409,22 +8394,27 @@
                     <a:bodyPr/>
                     <a:lstStyle/>
                     <a:p>
-                      <a:pPr marL="0" indent="0" algn="ctr" fontAlgn="base">
+                      <a:pPr marL="0" lvl="0" indent="0" algn="ctr">
                         <a:lnSpc>
                           <a:spcPts val="1275"/>
                         </a:lnSpc>
                         <a:buNone/>
                       </a:pPr>
-                      <a:endParaRPr lang="en-US" sz="1050" b="0" i="0" u="none" strike="noStrike" dirty="0">
-                        <a:solidFill>
-                          <a:srgbClr val="000000"/>
-                        </a:solidFill>
-                        <a:effectLst/>
-                        <a:latin typeface="Graphik"/>
-                      </a:endParaRPr>
+                      <a:r>
+                        <a:rPr lang="en-US" sz="1050" b="0" i="0" u="none" strike="noStrike" dirty="0">
+                          <a:solidFill>
+                            <a:srgbClr val="000000"/>
+                          </a:solidFill>
+                          <a:effectLst/>
+                          <a:latin typeface="Calibri" panose="020F0502020204030204" pitchFamily="34" charset="0"/>
+                          <a:ea typeface="Calibri" panose="020F0502020204030204" pitchFamily="34" charset="0"/>
+                          <a:cs typeface="Calibri" panose="020F0502020204030204" pitchFamily="34" charset="0"/>
+                        </a:rPr>
+                        <a:t>$N2_USF</a:t>
+                      </a:r>
                     </a:p>
                   </a:txBody>
-                  <a:tcPr marL="6344" marR="6344" marT="6344" anchor="ctr">
+                  <a:tcPr marL="6343" marR="6343" marT="6343" anchor="ctr">
                     <a:lnL w="9525" cap="flat" cmpd="sng" algn="ctr">
                       <a:solidFill>
                         <a:srgbClr val="FFFFFF"/>
@@ -8472,7 +8462,7 @@
                   </a:ext>
                 </a:extLst>
               </a:tr>
-              <a:tr h="255846">
+              <a:tr h="267660">
                 <a:tc>
                   <a:txBody>
                     <a:bodyPr/>
@@ -8555,25 +8545,38 @@
                         </a:lnSpc>
                         <a:buNone/>
                       </a:pPr>
-                      <a:endParaRPr lang="en-US" sz="1050" b="0" i="0" u="none" strike="noStrike" dirty="0">
-                        <a:solidFill>
-                          <a:srgbClr val="000000"/>
-                        </a:solidFill>
-                        <a:effectLst/>
-                        <a:latin typeface="Graphik"/>
-                      </a:endParaRPr>
+                      <a:r>
+                        <a:rPr lang="en-US" sz="1050" b="0" i="0" u="none" strike="noStrike" dirty="0">
+                          <a:solidFill>
+                            <a:srgbClr val="000000"/>
+                          </a:solidFill>
+                          <a:effectLst/>
+                          <a:latin typeface="Calibri" panose="020F0502020204030204" pitchFamily="34" charset="0"/>
+                          <a:ea typeface="Calibri" panose="020F0502020204030204" pitchFamily="34" charset="0"/>
+                          <a:cs typeface="Calibri" panose="020F0502020204030204" pitchFamily="34" charset="0"/>
+                        </a:rPr>
+                        <a:t>$N_CC</a:t>
+                      </a:r>
                     </a:p>
                   </a:txBody>
                   <a:tcPr marL="6343" marR="6343" marT="6343" anchor="ctr">
-                    <a:lnL w="9524">
-                      <a:solidFill>
-                        <a:srgbClr val="FFFFFF"/>
-                      </a:solidFill>
+                    <a:lnL w="9525" cap="flat" cmpd="sng" algn="ctr">
+                      <a:solidFill>
+                        <a:srgbClr val="FFFFFF"/>
+                      </a:solidFill>
+                      <a:prstDash val="solid"/>
+                      <a:round/>
+                      <a:headEnd type="none" w="med" len="med"/>
+                      <a:tailEnd type="none" w="med" len="med"/>
                     </a:lnL>
-                    <a:lnR w="9524">
-                      <a:solidFill>
-                        <a:srgbClr val="FFFFFF"/>
-                      </a:solidFill>
+                    <a:lnR w="9524" cap="flat" cmpd="sng" algn="ctr">
+                      <a:solidFill>
+                        <a:srgbClr val="FFFFFF"/>
+                      </a:solidFill>
+                      <a:prstDash val="solid"/>
+                      <a:round/>
+                      <a:headEnd type="none" w="med" len="med"/>
+                      <a:tailEnd type="none" w="med" len="med"/>
                     </a:lnR>
                     <a:lnT w="9524">
                       <a:solidFill>
@@ -8595,23 +8598,28 @@
                     <a:bodyPr/>
                     <a:lstStyle/>
                     <a:p>
-                      <a:pPr marL="0" indent="0" algn="ctr" fontAlgn="base">
+                      <a:pPr marL="0" lvl="0" indent="0" algn="ctr">
                         <a:lnSpc>
                           <a:spcPts val="1275"/>
                         </a:lnSpc>
                         <a:buNone/>
                       </a:pPr>
-                      <a:endParaRPr lang="en-US" sz="1050" b="0" i="0" u="none" strike="noStrike" dirty="0">
-                        <a:solidFill>
-                          <a:srgbClr val="000000"/>
-                        </a:solidFill>
-                        <a:effectLst/>
-                        <a:latin typeface="Graphik"/>
-                      </a:endParaRPr>
+                      <a:r>
+                        <a:rPr lang="en-US" sz="1050" b="0" i="0" u="none" strike="noStrike" dirty="0">
+                          <a:solidFill>
+                            <a:srgbClr val="000000"/>
+                          </a:solidFill>
+                          <a:effectLst/>
+                          <a:latin typeface="Calibri" panose="020F0502020204030204" pitchFamily="34" charset="0"/>
+                          <a:ea typeface="Calibri" panose="020F0502020204030204" pitchFamily="34" charset="0"/>
+                          <a:cs typeface="Calibri" panose="020F0502020204030204" pitchFamily="34" charset="0"/>
+                        </a:rPr>
+                        <a:t>$N1_CC</a:t>
+                      </a:r>
                     </a:p>
                   </a:txBody>
-                  <a:tcPr marL="6344" marR="6344" marT="6344" anchor="ctr">
-                    <a:lnL w="9525" cap="flat" cmpd="sng" algn="ctr">
+                  <a:tcPr marL="6343" marR="6343" marT="6343" anchor="ctr">
+                    <a:lnL w="9524" cap="flat" cmpd="sng" algn="ctr">
                       <a:solidFill>
                         <a:srgbClr val="FFFFFF"/>
                       </a:solidFill>
@@ -8657,22 +8665,27 @@
                     <a:bodyPr/>
                     <a:lstStyle/>
                     <a:p>
-                      <a:pPr marL="0" indent="0" algn="ctr" fontAlgn="base">
+                      <a:pPr marL="0" lvl="0" indent="0" algn="ctr">
                         <a:lnSpc>
                           <a:spcPts val="1275"/>
                         </a:lnSpc>
                         <a:buNone/>
                       </a:pPr>
-                      <a:endParaRPr lang="en-US" sz="1050" b="0" i="0" u="none" strike="noStrike" dirty="0">
-                        <a:solidFill>
-                          <a:srgbClr val="000000"/>
-                        </a:solidFill>
-                        <a:effectLst/>
-                        <a:latin typeface="Graphik"/>
-                      </a:endParaRPr>
+                      <a:r>
+                        <a:rPr lang="en-US" sz="1050" b="0" i="0" u="none" strike="noStrike" dirty="0">
+                          <a:solidFill>
+                            <a:srgbClr val="000000"/>
+                          </a:solidFill>
+                          <a:effectLst/>
+                          <a:latin typeface="Calibri" panose="020F0502020204030204" pitchFamily="34" charset="0"/>
+                          <a:ea typeface="Calibri" panose="020F0502020204030204" pitchFamily="34" charset="0"/>
+                          <a:cs typeface="Calibri" panose="020F0502020204030204" pitchFamily="34" charset="0"/>
+                        </a:rPr>
+                        <a:t>$N2_CC</a:t>
+                      </a:r>
                     </a:p>
                   </a:txBody>
-                  <a:tcPr marL="6344" marR="6344" marT="6344" anchor="ctr">
+                  <a:tcPr marL="6343" marR="6343" marT="6343" anchor="ctr">
                     <a:lnL w="9525" cap="flat" cmpd="sng" algn="ctr">
                       <a:solidFill>
                         <a:srgbClr val="FFFFFF"/>
@@ -8720,7 +8733,7 @@
                   </a:ext>
                 </a:extLst>
               </a:tr>
-              <a:tr h="403968">
+              <a:tr h="436194">
                 <a:tc>
                   <a:txBody>
                     <a:bodyPr/>
@@ -8803,25 +8816,38 @@
                         </a:lnSpc>
                         <a:buNone/>
                       </a:pPr>
-                      <a:endParaRPr lang="en-US" sz="1050" b="0" i="0" u="none" strike="noStrike" dirty="0">
-                        <a:solidFill>
-                          <a:srgbClr val="000000"/>
-                        </a:solidFill>
-                        <a:effectLst/>
-                        <a:latin typeface="Graphik"/>
-                      </a:endParaRPr>
+                      <a:r>
+                        <a:rPr lang="en-US" sz="1050" b="0" i="0" u="none" strike="noStrike" dirty="0">
+                          <a:solidFill>
+                            <a:srgbClr val="000000"/>
+                          </a:solidFill>
+                          <a:effectLst/>
+                          <a:latin typeface="Calibri" panose="020F0502020204030204" pitchFamily="34" charset="0"/>
+                          <a:ea typeface="Calibri" panose="020F0502020204030204" pitchFamily="34" charset="0"/>
+                          <a:cs typeface="Calibri" panose="020F0502020204030204" pitchFamily="34" charset="0"/>
+                        </a:rPr>
+                        <a:t>$N_SCC</a:t>
+                      </a:r>
                     </a:p>
                   </a:txBody>
                   <a:tcPr marL="6343" marR="6343" marT="6343" anchor="b">
-                    <a:lnL w="9524">
-                      <a:solidFill>
-                        <a:srgbClr val="FFFFFF"/>
-                      </a:solidFill>
+                    <a:lnL w="9525" cap="flat" cmpd="sng" algn="ctr">
+                      <a:solidFill>
+                        <a:srgbClr val="FFFFFF"/>
+                      </a:solidFill>
+                      <a:prstDash val="solid"/>
+                      <a:round/>
+                      <a:headEnd type="none" w="med" len="med"/>
+                      <a:tailEnd type="none" w="med" len="med"/>
                     </a:lnL>
-                    <a:lnR w="9524">
-                      <a:solidFill>
-                        <a:srgbClr val="FFFFFF"/>
-                      </a:solidFill>
+                    <a:lnR w="9524" cap="flat" cmpd="sng" algn="ctr">
+                      <a:solidFill>
+                        <a:srgbClr val="FFFFFF"/>
+                      </a:solidFill>
+                      <a:prstDash val="solid"/>
+                      <a:round/>
+                      <a:headEnd type="none" w="med" len="med"/>
+                      <a:tailEnd type="none" w="med" len="med"/>
                     </a:lnR>
                     <a:lnT w="9524">
                       <a:solidFill>
@@ -8843,23 +8869,28 @@
                     <a:bodyPr/>
                     <a:lstStyle/>
                     <a:p>
-                      <a:pPr marL="0" indent="0" algn="ctr" fontAlgn="base">
+                      <a:pPr marL="0" lvl="0" indent="0" algn="ctr">
                         <a:lnSpc>
                           <a:spcPts val="1275"/>
                         </a:lnSpc>
                         <a:buNone/>
                       </a:pPr>
-                      <a:endParaRPr lang="en-US" sz="1050" b="0" i="0" u="none" strike="noStrike" dirty="0">
-                        <a:solidFill>
-                          <a:srgbClr val="000000"/>
-                        </a:solidFill>
-                        <a:effectLst/>
-                        <a:latin typeface="Graphik"/>
-                      </a:endParaRPr>
+                      <a:r>
+                        <a:rPr lang="en-US" sz="1050" b="0" i="0" u="none" strike="noStrike" dirty="0">
+                          <a:solidFill>
+                            <a:srgbClr val="000000"/>
+                          </a:solidFill>
+                          <a:effectLst/>
+                          <a:latin typeface="Calibri" panose="020F0502020204030204" pitchFamily="34" charset="0"/>
+                          <a:ea typeface="Calibri" panose="020F0502020204030204" pitchFamily="34" charset="0"/>
+                          <a:cs typeface="Calibri" panose="020F0502020204030204" pitchFamily="34" charset="0"/>
+                        </a:rPr>
+                        <a:t>$N1_SCC</a:t>
+                      </a:r>
                     </a:p>
                   </a:txBody>
-                  <a:tcPr marL="6344" marR="6344" marT="6344" anchor="b">
-                    <a:lnL w="9525" cap="flat" cmpd="sng" algn="ctr">
+                  <a:tcPr marL="6343" marR="6343" marT="6343" anchor="b">
+                    <a:lnL w="9524" cap="flat" cmpd="sng" algn="ctr">
                       <a:solidFill>
                         <a:srgbClr val="FFFFFF"/>
                       </a:solidFill>
@@ -8905,22 +8936,27 @@
                     <a:bodyPr/>
                     <a:lstStyle/>
                     <a:p>
-                      <a:pPr marL="0" indent="0" algn="ctr" fontAlgn="base">
+                      <a:pPr marL="0" lvl="0" indent="0" algn="ctr">
                         <a:lnSpc>
                           <a:spcPts val="1275"/>
                         </a:lnSpc>
                         <a:buNone/>
                       </a:pPr>
-                      <a:endParaRPr lang="en-US" sz="1050" b="0" i="0" u="none" strike="noStrike" dirty="0">
-                        <a:solidFill>
-                          <a:srgbClr val="000000"/>
-                        </a:solidFill>
-                        <a:effectLst/>
-                        <a:latin typeface="Graphik"/>
-                      </a:endParaRPr>
+                      <a:r>
+                        <a:rPr lang="en-US" sz="1050" b="0" i="0" u="none" strike="noStrike" dirty="0">
+                          <a:solidFill>
+                            <a:srgbClr val="000000"/>
+                          </a:solidFill>
+                          <a:effectLst/>
+                          <a:latin typeface="Calibri" panose="020F0502020204030204" pitchFamily="34" charset="0"/>
+                          <a:ea typeface="Calibri" panose="020F0502020204030204" pitchFamily="34" charset="0"/>
+                          <a:cs typeface="Calibri" panose="020F0502020204030204" pitchFamily="34" charset="0"/>
+                        </a:rPr>
+                        <a:t>$N2_SCC</a:t>
+                      </a:r>
                     </a:p>
                   </a:txBody>
-                  <a:tcPr marL="6344" marR="6344" marT="6344" anchor="b">
+                  <a:tcPr marL="6343" marR="6343" marT="6343" anchor="b">
                     <a:lnL w="9525" cap="flat" cmpd="sng" algn="ctr">
                       <a:solidFill>
                         <a:srgbClr val="FFFFFF"/>
@@ -8987,14 +9023,14 @@
           <p:nvPr>
             <p:extLst>
               <p:ext uri="{D42A27DB-BD31-4B8C-83A1-F6EECF244321}">
-                <p14:modId xmlns:p14="http://schemas.microsoft.com/office/powerpoint/2010/main" val="454364608"/>
+                <p14:modId xmlns:p14="http://schemas.microsoft.com/office/powerpoint/2010/main" val="2605936030"/>
               </p:ext>
             </p:extLst>
           </p:nvPr>
         </p:nvGraphicFramePr>
         <p:xfrm>
-          <a:off x="359385" y="2814468"/>
-          <a:ext cx="6425037" cy="994601"/>
+          <a:off x="359385" y="2444611"/>
+          <a:ext cx="6425037" cy="1360361"/>
         </p:xfrm>
         <a:graphic>
           <a:graphicData uri="http://schemas.openxmlformats.org/drawingml/2006/table">
@@ -9010,14 +9046,14 @@
                     </a:ext>
                   </a:extLst>
                 </a:gridCol>
-                <a:gridCol w="4578392">
+                <a:gridCol w="3701877">
                   <a:extLst>
                     <a:ext uri="{9D8B030D-6E8A-4147-A177-3AD203B41FA5}">
                       <a16:colId xmlns:a16="http://schemas.microsoft.com/office/drawing/2014/main" val="304544959"/>
                     </a:ext>
                   </a:extLst>
                 </a:gridCol>
-                <a:gridCol w="327028">
+                <a:gridCol w="1203543">
                   <a:extLst>
                     <a:ext uri="{9D8B030D-6E8A-4147-A177-3AD203B41FA5}">
                       <a16:colId xmlns:a16="http://schemas.microsoft.com/office/drawing/2014/main" val="3902422458"/>
@@ -9208,7 +9244,7 @@
                         <a:buNone/>
                       </a:pPr>
                       <a:r>
-                        <a:rPr lang="en-US" sz="1000" b="0" i="0">
+                        <a:rPr lang="en-US" sz="1000" b="0" i="0" dirty="0">
                           <a:solidFill>
                             <a:srgbClr val="000000"/>
                           </a:solidFill>
@@ -9217,7 +9253,7 @@
                         </a:rPr>
                         <a:t>Title</a:t>
                       </a:r>
-                      <a:endParaRPr lang="en-US" b="0" i="0">
+                      <a:endParaRPr lang="en-US" b="0" i="0" dirty="0">
                         <a:solidFill>
                           <a:srgbClr val="000000"/>
                         </a:solidFill>
@@ -9275,9 +9311,15 @@
                       <a:pPr fontAlgn="ctr">
                         <a:buNone/>
                       </a:pPr>
-                      <a:endParaRPr lang="en-US">
-                        <a:effectLst/>
-                      </a:endParaRPr>
+                      <a:r>
+                        <a:rPr lang="en-US" sz="1000" dirty="0">
+                          <a:effectLst/>
+                          <a:latin typeface="Calibri" panose="020F0502020204030204" pitchFamily="34" charset="0"/>
+                          <a:ea typeface="Calibri" panose="020F0502020204030204" pitchFamily="34" charset="0"/>
+                          <a:cs typeface="Calibri" panose="020F0502020204030204" pitchFamily="34" charset="0"/>
+                        </a:rPr>
+                        <a:t>Owner</a:t>
+                      </a:r>
                     </a:p>
                   </a:txBody>
                   <a:tcPr anchor="ctr">
@@ -9399,7 +9441,7 @@
                   </a:ext>
                 </a:extLst>
               </a:tr>
-              <a:tr h="209550">
+              <a:tr h="0">
                 <a:tc>
                   <a:txBody>
                     <a:bodyPr/>
@@ -9463,7 +9505,7 @@
                       <a:pPr fontAlgn="t">
                         <a:buNone/>
                       </a:pPr>
-                      <a:endParaRPr lang="en-US">
+                      <a:endParaRPr lang="en-US" dirty="0">
                         <a:effectLst/>
                       </a:endParaRPr>
                     </a:p>
@@ -9518,7 +9560,7 @@
                       <a:pPr fontAlgn="t">
                         <a:buNone/>
                       </a:pPr>
-                      <a:endParaRPr lang="en-US">
+                      <a:endParaRPr lang="en-US" dirty="0">
                         <a:effectLst/>
                       </a:endParaRPr>
                     </a:p>
@@ -9565,6 +9607,68 @@
                     </a:solidFill>
                   </a:tcPr>
                 </a:tc>
+                <a:tc>
+                  <a:txBody>
+                    <a:bodyPr/>
+                    <a:lstStyle/>
+                    <a:p>
+                      <a:pPr fontAlgn="ctr">
+                        <a:buNone/>
+                      </a:pPr>
+                      <a:endParaRPr lang="en-US" dirty="0">
+                        <a:effectLst/>
+                      </a:endParaRPr>
+                    </a:p>
+                  </a:txBody>
+                  <a:tcPr anchor="ctr">
+                    <a:lnL w="9525" cap="flat" cmpd="sng" algn="ctr">
+                      <a:solidFill>
+                        <a:srgbClr val="BFBFBF"/>
+                      </a:solidFill>
+                      <a:prstDash val="solid"/>
+                      <a:round/>
+                      <a:headEnd type="none" w="med" len="med"/>
+                      <a:tailEnd type="none" w="med" len="med"/>
+                    </a:lnL>
+                    <a:lnR w="9525" cap="flat" cmpd="sng" algn="ctr">
+                      <a:solidFill>
+                        <a:srgbClr val="BFBFBF"/>
+                      </a:solidFill>
+                      <a:prstDash val="solid"/>
+                      <a:round/>
+                      <a:headEnd type="none" w="med" len="med"/>
+                      <a:tailEnd type="none" w="med" len="med"/>
+                    </a:lnR>
+                    <a:lnT w="9525" cap="flat" cmpd="sng" algn="ctr">
+                      <a:solidFill>
+                        <a:srgbClr val="BFBFBF"/>
+                      </a:solidFill>
+                      <a:prstDash val="solid"/>
+                      <a:round/>
+                      <a:headEnd type="none" w="med" len="med"/>
+                      <a:tailEnd type="none" w="med" len="med"/>
+                    </a:lnT>
+                    <a:lnB w="9525" cap="flat" cmpd="sng" algn="ctr">
+                      <a:solidFill>
+                        <a:srgbClr val="BFBFBF"/>
+                      </a:solidFill>
+                      <a:prstDash val="solid"/>
+                      <a:round/>
+                      <a:headEnd type="none" w="med" len="med"/>
+                      <a:tailEnd type="none" w="med" len="med"/>
+                    </a:lnB>
+                    <a:solidFill>
+                      <a:srgbClr val="FFFFFF"/>
+                    </a:solidFill>
+                  </a:tcPr>
+                </a:tc>
+                <a:extLst>
+                  <a:ext uri="{0D108BD9-81ED-4DB2-BD59-A6C34878D82A}">
+                    <a16:rowId xmlns:a16="http://schemas.microsoft.com/office/drawing/2014/main" val="3903486136"/>
+                  </a:ext>
+                </a:extLst>
+              </a:tr>
+              <a:tr h="0">
                 <a:tc>
                   <a:txBody>
                     <a:bodyPr/>
@@ -9620,9 +9724,174 @@
                     </a:solidFill>
                   </a:tcPr>
                 </a:tc>
+                <a:tc>
+                  <a:txBody>
+                    <a:bodyPr/>
+                    <a:lstStyle/>
+                    <a:p>
+                      <a:pPr fontAlgn="t">
+                        <a:buNone/>
+                      </a:pPr>
+                      <a:endParaRPr lang="en-US" dirty="0">
+                        <a:effectLst/>
+                      </a:endParaRPr>
+                    </a:p>
+                  </a:txBody>
+                  <a:tcPr>
+                    <a:lnL w="9525" cap="flat" cmpd="sng" algn="ctr">
+                      <a:solidFill>
+                        <a:srgbClr val="BFBFBF"/>
+                      </a:solidFill>
+                      <a:prstDash val="solid"/>
+                      <a:round/>
+                      <a:headEnd type="none" w="med" len="med"/>
+                      <a:tailEnd type="none" w="med" len="med"/>
+                    </a:lnL>
+                    <a:lnR w="9525" cap="flat" cmpd="sng" algn="ctr">
+                      <a:solidFill>
+                        <a:srgbClr val="BFBFBF"/>
+                      </a:solidFill>
+                      <a:prstDash val="solid"/>
+                      <a:round/>
+                      <a:headEnd type="none" w="med" len="med"/>
+                      <a:tailEnd type="none" w="med" len="med"/>
+                    </a:lnR>
+                    <a:lnT w="9525" cap="flat" cmpd="sng" algn="ctr">
+                      <a:solidFill>
+                        <a:srgbClr val="BFBFBF"/>
+                      </a:solidFill>
+                      <a:prstDash val="solid"/>
+                      <a:round/>
+                      <a:headEnd type="none" w="med" len="med"/>
+                      <a:tailEnd type="none" w="med" len="med"/>
+                    </a:lnT>
+                    <a:lnB w="9525" cap="flat" cmpd="sng" algn="ctr">
+                      <a:solidFill>
+                        <a:srgbClr val="BFBFBF"/>
+                      </a:solidFill>
+                      <a:prstDash val="solid"/>
+                      <a:round/>
+                      <a:headEnd type="none" w="med" len="med"/>
+                      <a:tailEnd type="none" w="med" len="med"/>
+                    </a:lnB>
+                    <a:solidFill>
+                      <a:srgbClr val="FFFFFF"/>
+                    </a:solidFill>
+                  </a:tcPr>
+                </a:tc>
+                <a:tc>
+                  <a:txBody>
+                    <a:bodyPr/>
+                    <a:lstStyle/>
+                    <a:p>
+                      <a:pPr fontAlgn="t">
+                        <a:buNone/>
+                      </a:pPr>
+                      <a:endParaRPr lang="en-US" dirty="0">
+                        <a:effectLst/>
+                      </a:endParaRPr>
+                    </a:p>
+                  </a:txBody>
+                  <a:tcPr>
+                    <a:lnL w="9525" cap="flat" cmpd="sng" algn="ctr">
+                      <a:solidFill>
+                        <a:srgbClr val="BFBFBF"/>
+                      </a:solidFill>
+                      <a:prstDash val="solid"/>
+                      <a:round/>
+                      <a:headEnd type="none" w="med" len="med"/>
+                      <a:tailEnd type="none" w="med" len="med"/>
+                    </a:lnL>
+                    <a:lnR w="9525" cap="flat" cmpd="sng" algn="ctr">
+                      <a:solidFill>
+                        <a:srgbClr val="BFBFBF"/>
+                      </a:solidFill>
+                      <a:prstDash val="solid"/>
+                      <a:round/>
+                      <a:headEnd type="none" w="med" len="med"/>
+                      <a:tailEnd type="none" w="med" len="med"/>
+                    </a:lnR>
+                    <a:lnT w="9525" cap="flat" cmpd="sng" algn="ctr">
+                      <a:solidFill>
+                        <a:srgbClr val="BFBFBF"/>
+                      </a:solidFill>
+                      <a:prstDash val="solid"/>
+                      <a:round/>
+                      <a:headEnd type="none" w="med" len="med"/>
+                      <a:tailEnd type="none" w="med" len="med"/>
+                    </a:lnT>
+                    <a:lnB w="9525" cap="flat" cmpd="sng" algn="ctr">
+                      <a:solidFill>
+                        <a:srgbClr val="BFBFBF"/>
+                      </a:solidFill>
+                      <a:prstDash val="solid"/>
+                      <a:round/>
+                      <a:headEnd type="none" w="med" len="med"/>
+                      <a:tailEnd type="none" w="med" len="med"/>
+                    </a:lnB>
+                    <a:solidFill>
+                      <a:srgbClr val="FFFFFF"/>
+                    </a:solidFill>
+                  </a:tcPr>
+                </a:tc>
+                <a:tc>
+                  <a:txBody>
+                    <a:bodyPr/>
+                    <a:lstStyle/>
+                    <a:p>
+                      <a:pPr fontAlgn="ctr">
+                        <a:buNone/>
+                      </a:pPr>
+                      <a:endParaRPr lang="en-US" dirty="0">
+                        <a:effectLst/>
+                      </a:endParaRPr>
+                    </a:p>
+                  </a:txBody>
+                  <a:tcPr anchor="ctr">
+                    <a:lnL w="9525" cap="flat" cmpd="sng" algn="ctr">
+                      <a:solidFill>
+                        <a:srgbClr val="BFBFBF"/>
+                      </a:solidFill>
+                      <a:prstDash val="solid"/>
+                      <a:round/>
+                      <a:headEnd type="none" w="med" len="med"/>
+                      <a:tailEnd type="none" w="med" len="med"/>
+                    </a:lnL>
+                    <a:lnR w="9525" cap="flat" cmpd="sng" algn="ctr">
+                      <a:solidFill>
+                        <a:srgbClr val="BFBFBF"/>
+                      </a:solidFill>
+                      <a:prstDash val="solid"/>
+                      <a:round/>
+                      <a:headEnd type="none" w="med" len="med"/>
+                      <a:tailEnd type="none" w="med" len="med"/>
+                    </a:lnR>
+                    <a:lnT w="9525" cap="flat" cmpd="sng" algn="ctr">
+                      <a:solidFill>
+                        <a:srgbClr val="BFBFBF"/>
+                      </a:solidFill>
+                      <a:prstDash val="solid"/>
+                      <a:round/>
+                      <a:headEnd type="none" w="med" len="med"/>
+                      <a:tailEnd type="none" w="med" len="med"/>
+                    </a:lnT>
+                    <a:lnB w="9525" cap="flat" cmpd="sng" algn="ctr">
+                      <a:solidFill>
+                        <a:srgbClr val="BFBFBF"/>
+                      </a:solidFill>
+                      <a:prstDash val="solid"/>
+                      <a:round/>
+                      <a:headEnd type="none" w="med" len="med"/>
+                      <a:tailEnd type="none" w="med" len="med"/>
+                    </a:lnB>
+                    <a:solidFill>
+                      <a:srgbClr val="FFFFFF"/>
+                    </a:solidFill>
+                  </a:tcPr>
+                </a:tc>
                 <a:extLst>
                   <a:ext uri="{0D108BD9-81ED-4DB2-BD59-A6C34878D82A}">
-                    <a16:rowId xmlns:a16="http://schemas.microsoft.com/office/drawing/2014/main" val="3903486136"/>
+                    <a16:rowId xmlns:a16="http://schemas.microsoft.com/office/drawing/2014/main" val="1214303278"/>
                   </a:ext>
                 </a:extLst>
               </a:tr>

--- a/WSR-Template.pptx
+++ b/WSR-Template.pptx
@@ -5977,7 +5977,7 @@
           <p:nvPr>
             <p:extLst>
               <p:ext uri="{D42A27DB-BD31-4B8C-83A1-F6EECF244321}">
-                <p14:modId xmlns:p14="http://schemas.microsoft.com/office/powerpoint/2010/main" val="1099161087"/>
+                <p14:modId xmlns:p14="http://schemas.microsoft.com/office/powerpoint/2010/main" val="1777070874"/>
               </p:ext>
             </p:extLst>
           </p:nvPr>
@@ -8284,7 +8284,7 @@
                           <a:ea typeface="Calibri" panose="020F0502020204030204" pitchFamily="34" charset="0"/>
                           <a:cs typeface="Calibri" panose="020F0502020204030204" pitchFamily="34" charset="0"/>
                         </a:rPr>
-                        <a:t>$N_USF</a:t>
+                        <a:t>$N_SUS</a:t>
                       </a:r>
                     </a:p>
                   </a:txBody>
@@ -8343,7 +8343,7 @@
                           <a:ea typeface="Calibri" panose="020F0502020204030204" pitchFamily="34" charset="0"/>
                           <a:cs typeface="Calibri" panose="020F0502020204030204" pitchFamily="34" charset="0"/>
                         </a:rPr>
-                        <a:t>$N1_USF</a:t>
+                        <a:t>$N1_SUSF</a:t>
                       </a:r>
                     </a:p>
                   </a:txBody>
@@ -8410,8 +8410,29 @@
                           <a:ea typeface="Calibri" panose="020F0502020204030204" pitchFamily="34" charset="0"/>
                           <a:cs typeface="Calibri" panose="020F0502020204030204" pitchFamily="34" charset="0"/>
                         </a:rPr>
-                        <a:t>$N2_USF</a:t>
+                        <a:t>$</a:t>
                       </a:r>
+                      <a:r>
+                        <a:rPr lang="en-US" sz="1050" b="0" i="0" u="none" strike="noStrike">
+                          <a:solidFill>
+                            <a:srgbClr val="000000"/>
+                          </a:solidFill>
+                          <a:effectLst/>
+                          <a:latin typeface="Calibri" panose="020F0502020204030204" pitchFamily="34" charset="0"/>
+                          <a:ea typeface="Calibri" panose="020F0502020204030204" pitchFamily="34" charset="0"/>
+                          <a:cs typeface="Calibri" panose="020F0502020204030204" pitchFamily="34" charset="0"/>
+                        </a:rPr>
+                        <a:t>N2_SUSF</a:t>
+                      </a:r>
+                      <a:endParaRPr lang="en-US" sz="1050" b="0" i="0" u="none" strike="noStrike" dirty="0">
+                        <a:solidFill>
+                          <a:srgbClr val="000000"/>
+                        </a:solidFill>
+                        <a:effectLst/>
+                        <a:latin typeface="Calibri" panose="020F0502020204030204" pitchFamily="34" charset="0"/>
+                        <a:ea typeface="Calibri" panose="020F0502020204030204" pitchFamily="34" charset="0"/>
+                        <a:cs typeface="Calibri" panose="020F0502020204030204" pitchFamily="34" charset="0"/>
+                      </a:endParaRPr>
                     </a:p>
                   </a:txBody>
                   <a:tcPr marL="6343" marR="6343" marT="6343" anchor="ctr">

--- a/WSR-Template.pptx
+++ b/WSR-Template.pptx
@@ -251,7 +251,7 @@
           <a:p>
             <a:fld id="{846CE7D5-CF57-46EF-B807-FDD0502418D4}" type="datetimeFigureOut">
               <a:rPr lang="en-US" smtClean="0"/>
-              <a:t>6/17/2026</a:t>
+              <a:t>6/19/2026</a:t>
             </a:fld>
             <a:endParaRPr lang="en-US"/>
           </a:p>
@@ -421,7 +421,7 @@
           <a:p>
             <a:fld id="{846CE7D5-CF57-46EF-B807-FDD0502418D4}" type="datetimeFigureOut">
               <a:rPr lang="en-US" smtClean="0"/>
-              <a:t>6/17/2026</a:t>
+              <a:t>6/19/2026</a:t>
             </a:fld>
             <a:endParaRPr lang="en-US"/>
           </a:p>
@@ -601,7 +601,7 @@
           <a:p>
             <a:fld id="{846CE7D5-CF57-46EF-B807-FDD0502418D4}" type="datetimeFigureOut">
               <a:rPr lang="en-US" smtClean="0"/>
-              <a:t>6/17/2026</a:t>
+              <a:t>6/19/2026</a:t>
             </a:fld>
             <a:endParaRPr lang="en-US"/>
           </a:p>
@@ -771,7 +771,7 @@
           <a:p>
             <a:fld id="{846CE7D5-CF57-46EF-B807-FDD0502418D4}" type="datetimeFigureOut">
               <a:rPr lang="en-US" smtClean="0"/>
-              <a:t>6/17/2026</a:t>
+              <a:t>6/19/2026</a:t>
             </a:fld>
             <a:endParaRPr lang="en-US"/>
           </a:p>
@@ -1017,7 +1017,7 @@
           <a:p>
             <a:fld id="{846CE7D5-CF57-46EF-B807-FDD0502418D4}" type="datetimeFigureOut">
               <a:rPr lang="en-US" smtClean="0"/>
-              <a:t>6/17/2026</a:t>
+              <a:t>6/19/2026</a:t>
             </a:fld>
             <a:endParaRPr lang="en-US"/>
           </a:p>
@@ -1249,7 +1249,7 @@
           <a:p>
             <a:fld id="{846CE7D5-CF57-46EF-B807-FDD0502418D4}" type="datetimeFigureOut">
               <a:rPr lang="en-US" smtClean="0"/>
-              <a:t>6/17/2026</a:t>
+              <a:t>6/19/2026</a:t>
             </a:fld>
             <a:endParaRPr lang="en-US"/>
           </a:p>
@@ -1616,7 +1616,7 @@
           <a:p>
             <a:fld id="{846CE7D5-CF57-46EF-B807-FDD0502418D4}" type="datetimeFigureOut">
               <a:rPr lang="en-US" smtClean="0"/>
-              <a:t>6/17/2026</a:t>
+              <a:t>6/19/2026</a:t>
             </a:fld>
             <a:endParaRPr lang="en-US"/>
           </a:p>
@@ -1734,7 +1734,7 @@
           <a:p>
             <a:fld id="{846CE7D5-CF57-46EF-B807-FDD0502418D4}" type="datetimeFigureOut">
               <a:rPr lang="en-US" smtClean="0"/>
-              <a:t>6/17/2026</a:t>
+              <a:t>6/19/2026</a:t>
             </a:fld>
             <a:endParaRPr lang="en-US"/>
           </a:p>
@@ -1829,7 +1829,7 @@
           <a:p>
             <a:fld id="{846CE7D5-CF57-46EF-B807-FDD0502418D4}" type="datetimeFigureOut">
               <a:rPr lang="en-US" smtClean="0"/>
-              <a:t>6/17/2026</a:t>
+              <a:t>6/19/2026</a:t>
             </a:fld>
             <a:endParaRPr lang="en-US"/>
           </a:p>
@@ -2106,7 +2106,7 @@
           <a:p>
             <a:fld id="{846CE7D5-CF57-46EF-B807-FDD0502418D4}" type="datetimeFigureOut">
               <a:rPr lang="en-US" smtClean="0"/>
-              <a:t>6/17/2026</a:t>
+              <a:t>6/19/2026</a:t>
             </a:fld>
             <a:endParaRPr lang="en-US"/>
           </a:p>
@@ -2363,7 +2363,7 @@
           <a:p>
             <a:fld id="{846CE7D5-CF57-46EF-B807-FDD0502418D4}" type="datetimeFigureOut">
               <a:rPr lang="en-US" smtClean="0"/>
-              <a:t>6/17/2026</a:t>
+              <a:t>6/19/2026</a:t>
             </a:fld>
             <a:endParaRPr lang="en-US"/>
           </a:p>
@@ -2576,7 +2576,7 @@
           <a:p>
             <a:fld id="{846CE7D5-CF57-46EF-B807-FDD0502418D4}" type="datetimeFigureOut">
               <a:rPr lang="en-US" smtClean="0"/>
-              <a:t>6/17/2026</a:t>
+              <a:t>6/19/2026</a:t>
             </a:fld>
             <a:endParaRPr lang="en-US"/>
           </a:p>
@@ -3365,8 +3365,8 @@
         </p:nvSpPr>
         <p:spPr>
           <a:xfrm>
-            <a:off x="382947" y="3859704"/>
-            <a:ext cx="6401475" cy="1593560"/>
+            <a:off x="382947" y="3945763"/>
+            <a:ext cx="6401475" cy="1383221"/>
           </a:xfrm>
           <a:prstGeom prst="rect">
             <a:avLst/>
@@ -3501,7 +3501,7 @@
               <a:defRPr/>
             </a:pPr>
             <a:r>
-              <a:rPr lang="en-US" sz="1100" b="1">
+              <a:rPr lang="en-US" sz="1100" b="1" dirty="0">
                 <a:solidFill>
                   <a:schemeClr val="accent2"/>
                 </a:solidFill>
@@ -3511,7 +3511,7 @@
               </a:rPr>
               <a:t>MAJOR ACHIEVEMENTS &amp; KEY DECISIONS MADE</a:t>
             </a:r>
-            <a:endParaRPr lang="en-US">
+            <a:endParaRPr lang="en-US" dirty="0">
               <a:solidFill>
                 <a:srgbClr val="000000"/>
               </a:solidFill>
@@ -3521,30 +3521,24 @@
             </a:endParaRPr>
           </a:p>
           <a:p>
-            <a:pPr marL="171450" lvl="1" indent="-171450">
-              <a:buFont typeface="Arial,Sans-Serif"/>
-              <a:buChar char="•"/>
+            <a:pPr marL="0" lvl="1">
               <a:defRPr/>
             </a:pPr>
+            <a:r>
+              <a:rPr lang="en-US" sz="1100" dirty="0">
+                <a:solidFill>
+                  <a:srgbClr val="000000"/>
+                </a:solidFill>
+                <a:latin typeface="Graphik"/>
+                <a:ea typeface="Calibri"/>
+                <a:cs typeface="Calibri"/>
+              </a:rPr>
+              <a:t>$ACHIEVEMENT_DATA</a:t>
+            </a:r>
             <a:endParaRPr lang="en-US" sz="1100" dirty="0">
               <a:solidFill>
                 <a:schemeClr val="tx1"/>
               </a:solidFill>
-            </a:endParaRPr>
-          </a:p>
-          <a:p>
-            <a:pPr marL="171450" lvl="1" indent="-171450">
-              <a:buFont typeface="Arial,Sans-Serif"/>
-              <a:buChar char="•"/>
-              <a:defRPr/>
-            </a:pPr>
-            <a:endParaRPr lang="en-US" sz="1100">
-              <a:solidFill>
-                <a:srgbClr val="000000"/>
-              </a:solidFill>
-              <a:latin typeface="Graphik"/>
-              <a:ea typeface="Calibri"/>
-              <a:cs typeface="Calibri"/>
             </a:endParaRPr>
           </a:p>
         </p:txBody>
@@ -4213,7 +4207,7 @@
         </p:nvSpPr>
         <p:spPr>
           <a:xfrm>
-            <a:off x="366020" y="711370"/>
+            <a:off x="366020" y="730826"/>
             <a:ext cx="4045857" cy="259235"/>
           </a:xfrm>
           <a:prstGeom prst="rect">
@@ -4467,8 +4461,8 @@
         </p:nvSpPr>
         <p:spPr>
           <a:xfrm>
-            <a:off x="366521" y="5675661"/>
-            <a:ext cx="6422804" cy="911424"/>
+            <a:off x="366521" y="5588979"/>
+            <a:ext cx="6422804" cy="998106"/>
           </a:xfrm>
           <a:prstGeom prst="rect">
             <a:avLst/>
@@ -4612,13 +4606,23 @@
                 </a:solidFill>
                 <a:latin typeface="Graphik Light"/>
               </a:rPr>
-              <a:t>Upcoming PTO ():</a:t>
-            </a:r>
-            <a:r>
-              <a:rPr lang="en-US" sz="1100" dirty="0">
+              <a:t>Upcoming PTO ($PTO_DAY): </a:t>
+            </a:r>
+            <a:r>
+              <a:rPr lang="en-US" sz="900" b="1" dirty="0">
                 <a:solidFill>
                   <a:schemeClr val="tx1"/>
                 </a:solidFill>
+                <a:latin typeface="Graphik Light"/>
+              </a:rPr>
+              <a:t>$PTO_DATA</a:t>
+            </a:r>
+            <a:r>
+              <a:rPr lang="en-US" sz="1100" b="1" dirty="0">
+                <a:solidFill>
+                  <a:schemeClr val="tx1"/>
+                </a:solidFill>
+                <a:latin typeface="Graphik Light"/>
                 <a:ea typeface="+mn-lt"/>
                 <a:cs typeface="+mn-lt"/>
               </a:rPr>
@@ -4658,7 +4662,16 @@
                 </a:solidFill>
                 <a:latin typeface="Graphik Light"/>
               </a:rPr>
-              <a:t> Leave () :</a:t>
+              <a:t> Leave ($PTO_UL) : </a:t>
+            </a:r>
+            <a:r>
+              <a:rPr lang="en-US" sz="900" b="1" dirty="0">
+                <a:solidFill>
+                  <a:schemeClr val="tx1"/>
+                </a:solidFill>
+                <a:latin typeface="Graphik Light"/>
+              </a:rPr>
+              <a:t>$PTO_UL_DATA</a:t>
             </a:r>
             <a:br>
               <a:rPr lang="en-US" sz="900" dirty="0">
@@ -4679,7 +4692,16 @@
                 </a:solidFill>
                 <a:latin typeface="Graphik Light"/>
               </a:rPr>
-              <a:t>Upcoming Holiday():</a:t>
+              <a:t>Upcoming Holiday($HOLIDAY): </a:t>
+            </a:r>
+            <a:r>
+              <a:rPr lang="en-US" sz="900" b="1" dirty="0">
+                <a:solidFill>
+                  <a:schemeClr val="tx1"/>
+                </a:solidFill>
+                <a:latin typeface="Graphik Light"/>
+              </a:rPr>
+              <a:t>$HOL_DATA</a:t>
             </a:r>
             <a:endParaRPr lang="en-US" sz="1100" dirty="0">
               <a:solidFill>
@@ -4706,7 +4728,7 @@
         </p:nvSpPr>
         <p:spPr>
           <a:xfrm>
-            <a:off x="369227" y="5399532"/>
+            <a:off x="369227" y="5311980"/>
             <a:ext cx="5033147" cy="276999"/>
           </a:xfrm>
           <a:prstGeom prst="rect">
@@ -4859,13 +4881,13 @@
           <p:nvPr>
             <p:extLst>
               <p:ext uri="{D42A27DB-BD31-4B8C-83A1-F6EECF244321}">
-                <p14:modId xmlns:p14="http://schemas.microsoft.com/office/powerpoint/2010/main" val="1049854098"/>
+                <p14:modId xmlns:p14="http://schemas.microsoft.com/office/powerpoint/2010/main" val="2184930167"/>
               </p:ext>
             </p:extLst>
           </p:nvPr>
         </p:nvGraphicFramePr>
         <p:xfrm>
-          <a:off x="367812" y="1118747"/>
+          <a:off x="367812" y="1079835"/>
           <a:ext cx="11620500" cy="1252418"/>
         </p:xfrm>
         <a:graphic>
@@ -5977,14 +5999,14 @@
           <p:nvPr>
             <p:extLst>
               <p:ext uri="{D42A27DB-BD31-4B8C-83A1-F6EECF244321}">
-                <p14:modId xmlns:p14="http://schemas.microsoft.com/office/powerpoint/2010/main" val="1777070874"/>
+                <p14:modId xmlns:p14="http://schemas.microsoft.com/office/powerpoint/2010/main" val="324432429"/>
               </p:ext>
             </p:extLst>
           </p:nvPr>
         </p:nvGraphicFramePr>
         <p:xfrm>
-          <a:off x="6848841" y="2419632"/>
-          <a:ext cx="5153025" cy="4057398"/>
+          <a:off x="6848841" y="2419631"/>
+          <a:ext cx="5153025" cy="4167454"/>
         </p:xfrm>
         <a:graphic>
           <a:graphicData uri="http://schemas.openxmlformats.org/drawingml/2006/table">
@@ -6022,7 +6044,7 @@
                   </a:extLst>
                 </a:gridCol>
               </a:tblGrid>
-              <a:tr h="382650">
+              <a:tr h="393029">
                 <a:tc>
                   <a:txBody>
                     <a:bodyPr/>
@@ -6285,7 +6307,7 @@
                   </a:ext>
                 </a:extLst>
               </a:tr>
-              <a:tr h="267660">
+              <a:tr h="274920">
                 <a:tc>
                   <a:txBody>
                     <a:bodyPr/>
@@ -6556,7 +6578,7 @@
                   </a:ext>
                 </a:extLst>
               </a:tr>
-              <a:tr h="338098">
+              <a:tr h="347269">
                 <a:tc>
                   <a:txBody>
                     <a:bodyPr/>
@@ -6854,7 +6876,7 @@
                   </a:ext>
                 </a:extLst>
               </a:tr>
-              <a:tr h="436194">
+              <a:tr h="448026">
                 <a:tc>
                   <a:txBody>
                     <a:bodyPr/>
@@ -7107,7 +7129,7 @@
                   </a:ext>
                 </a:extLst>
               </a:tr>
-              <a:tr h="394447">
+              <a:tr h="405146">
                 <a:tc>
                   <a:txBody>
                     <a:bodyPr/>
@@ -7378,7 +7400,7 @@
                   </a:ext>
                 </a:extLst>
               </a:tr>
-              <a:tr h="436194">
+              <a:tr h="448026">
                 <a:tc>
                   <a:txBody>
                     <a:bodyPr/>
@@ -7649,7 +7671,7 @@
                   </a:ext>
                 </a:extLst>
               </a:tr>
-              <a:tr h="394447">
+              <a:tr h="405146">
                 <a:tc>
                   <a:txBody>
                     <a:bodyPr/>
@@ -7920,7 +7942,7 @@
                   </a:ext>
                 </a:extLst>
               </a:tr>
-              <a:tr h="267660">
+              <a:tr h="274920">
                 <a:tc>
                   <a:txBody>
                     <a:bodyPr/>
@@ -8191,7 +8213,7 @@
                   </a:ext>
                 </a:extLst>
               </a:tr>
-              <a:tr h="436194">
+              <a:tr h="448026">
                 <a:tc>
                   <a:txBody>
                     <a:bodyPr/>
@@ -8483,7 +8505,7 @@
                   </a:ext>
                 </a:extLst>
               </a:tr>
-              <a:tr h="267660">
+              <a:tr h="274920">
                 <a:tc>
                   <a:txBody>
                     <a:bodyPr/>
@@ -8754,7 +8776,7 @@
                   </a:ext>
                 </a:extLst>
               </a:tr>
-              <a:tr h="436194">
+              <a:tr h="448026">
                 <a:tc>
                   <a:txBody>
                     <a:bodyPr/>
@@ -9044,14 +9066,14 @@
           <p:nvPr>
             <p:extLst>
               <p:ext uri="{D42A27DB-BD31-4B8C-83A1-F6EECF244321}">
-                <p14:modId xmlns:p14="http://schemas.microsoft.com/office/powerpoint/2010/main" val="2605936030"/>
+                <p14:modId xmlns:p14="http://schemas.microsoft.com/office/powerpoint/2010/main" val="3255378090"/>
               </p:ext>
             </p:extLst>
           </p:nvPr>
         </p:nvGraphicFramePr>
         <p:xfrm>
           <a:off x="359385" y="2444611"/>
-          <a:ext cx="6425037" cy="1360361"/>
+          <a:ext cx="6425037" cy="1383221"/>
         </p:xfrm>
         <a:graphic>
           <a:graphicData uri="http://schemas.openxmlformats.org/drawingml/2006/table">
@@ -9471,9 +9493,15 @@
                       <a:pPr fontAlgn="ctr">
                         <a:buNone/>
                       </a:pPr>
-                      <a:endParaRPr lang="en-US">
-                        <a:effectLst/>
-                      </a:endParaRPr>
+                      <a:r>
+                        <a:rPr lang="en-US" sz="1050" b="1" dirty="0">
+                          <a:effectLst/>
+                          <a:latin typeface="Calibri" panose="020F0502020204030204" pitchFamily="34" charset="0"/>
+                          <a:ea typeface="Calibri" panose="020F0502020204030204" pitchFamily="34" charset="0"/>
+                          <a:cs typeface="Calibri" panose="020F0502020204030204" pitchFamily="34" charset="0"/>
+                        </a:rPr>
+                        <a:t>D</a:t>
+                      </a:r>
                     </a:p>
                   </a:txBody>
                   <a:tcPr anchor="ctr">
@@ -9526,9 +9554,15 @@
                       <a:pPr fontAlgn="t">
                         <a:buNone/>
                       </a:pPr>
-                      <a:endParaRPr lang="en-US" dirty="0">
-                        <a:effectLst/>
-                      </a:endParaRPr>
+                      <a:r>
+                        <a:rPr lang="en-US" sz="1050" dirty="0">
+                          <a:effectLst/>
+                          <a:latin typeface="Calibri" panose="020F0502020204030204" pitchFamily="34" charset="0"/>
+                          <a:ea typeface="Calibri" panose="020F0502020204030204" pitchFamily="34" charset="0"/>
+                          <a:cs typeface="Calibri" panose="020F0502020204030204" pitchFamily="34" charset="0"/>
+                        </a:rPr>
+                        <a:t>$D_T</a:t>
+                      </a:r>
                     </a:p>
                   </a:txBody>
                   <a:tcPr>
@@ -9581,9 +9615,15 @@
                       <a:pPr fontAlgn="t">
                         <a:buNone/>
                       </a:pPr>
-                      <a:endParaRPr lang="en-US" dirty="0">
-                        <a:effectLst/>
-                      </a:endParaRPr>
+                      <a:r>
+                        <a:rPr lang="en-US" sz="1050" dirty="0">
+                          <a:effectLst/>
+                          <a:latin typeface="Calibri" panose="020F0502020204030204" pitchFamily="34" charset="0"/>
+                          <a:ea typeface="Calibri" panose="020F0502020204030204" pitchFamily="34" charset="0"/>
+                          <a:cs typeface="Calibri" panose="020F0502020204030204" pitchFamily="34" charset="0"/>
+                        </a:rPr>
+                        <a:t>$D_O</a:t>
+                      </a:r>
                     </a:p>
                   </a:txBody>
                   <a:tcPr>
@@ -9636,9 +9676,15 @@
                       <a:pPr fontAlgn="ctr">
                         <a:buNone/>
                       </a:pPr>
-                      <a:endParaRPr lang="en-US" dirty="0">
-                        <a:effectLst/>
-                      </a:endParaRPr>
+                      <a:r>
+                        <a:rPr lang="en-US" sz="1050" dirty="0">
+                          <a:effectLst/>
+                          <a:latin typeface="Calibri" panose="020F0502020204030204" pitchFamily="34" charset="0"/>
+                          <a:ea typeface="Calibri" panose="020F0502020204030204" pitchFamily="34" charset="0"/>
+                          <a:cs typeface="Calibri" panose="020F0502020204030204" pitchFamily="34" charset="0"/>
+                        </a:rPr>
+                        <a:t>$D_MP</a:t>
+                      </a:r>
                     </a:p>
                   </a:txBody>
                   <a:tcPr anchor="ctr">
@@ -9698,9 +9744,15 @@
                       <a:pPr fontAlgn="ctr">
                         <a:buNone/>
                       </a:pPr>
-                      <a:endParaRPr lang="en-US">
-                        <a:effectLst/>
-                      </a:endParaRPr>
+                      <a:r>
+                        <a:rPr lang="en-US" sz="1050" b="1" dirty="0">
+                          <a:effectLst/>
+                          <a:latin typeface="Calibri" panose="020F0502020204030204" pitchFamily="34" charset="0"/>
+                          <a:ea typeface="Calibri" panose="020F0502020204030204" pitchFamily="34" charset="0"/>
+                          <a:cs typeface="Calibri" panose="020F0502020204030204" pitchFamily="34" charset="0"/>
+                        </a:rPr>
+                        <a:t>R</a:t>
+                      </a:r>
                     </a:p>
                   </a:txBody>
                   <a:tcPr anchor="ctr">
@@ -9753,9 +9805,15 @@
                       <a:pPr fontAlgn="t">
                         <a:buNone/>
                       </a:pPr>
-                      <a:endParaRPr lang="en-US" dirty="0">
-                        <a:effectLst/>
-                      </a:endParaRPr>
+                      <a:r>
+                        <a:rPr lang="en-US" sz="1050" dirty="0">
+                          <a:effectLst/>
+                          <a:latin typeface="Calibri" panose="020F0502020204030204" pitchFamily="34" charset="0"/>
+                          <a:ea typeface="Calibri" panose="020F0502020204030204" pitchFamily="34" charset="0"/>
+                          <a:cs typeface="Calibri" panose="020F0502020204030204" pitchFamily="34" charset="0"/>
+                        </a:rPr>
+                        <a:t>$R_T</a:t>
+                      </a:r>
                     </a:p>
                   </a:txBody>
                   <a:tcPr>
@@ -9808,9 +9866,15 @@
                       <a:pPr fontAlgn="t">
                         <a:buNone/>
                       </a:pPr>
-                      <a:endParaRPr lang="en-US" dirty="0">
-                        <a:effectLst/>
-                      </a:endParaRPr>
+                      <a:r>
+                        <a:rPr lang="en-US" sz="1050" dirty="0">
+                          <a:effectLst/>
+                          <a:latin typeface="Calibri" panose="020F0502020204030204" pitchFamily="34" charset="0"/>
+                          <a:ea typeface="Calibri" panose="020F0502020204030204" pitchFamily="34" charset="0"/>
+                          <a:cs typeface="Calibri" panose="020F0502020204030204" pitchFamily="34" charset="0"/>
+                        </a:rPr>
+                        <a:t>$R_O</a:t>
+                      </a:r>
                     </a:p>
                   </a:txBody>
                   <a:tcPr>
@@ -9863,9 +9927,15 @@
                       <a:pPr fontAlgn="ctr">
                         <a:buNone/>
                       </a:pPr>
-                      <a:endParaRPr lang="en-US" dirty="0">
-                        <a:effectLst/>
-                      </a:endParaRPr>
+                      <a:r>
+                        <a:rPr lang="en-US" sz="1050" dirty="0">
+                          <a:effectLst/>
+                          <a:latin typeface="Calibri" panose="020F0502020204030204" pitchFamily="34" charset="0"/>
+                          <a:ea typeface="Calibri" panose="020F0502020204030204" pitchFamily="34" charset="0"/>
+                          <a:cs typeface="Calibri" panose="020F0502020204030204" pitchFamily="34" charset="0"/>
+                        </a:rPr>
+                        <a:t>$R_MP</a:t>
+                      </a:r>
                     </a:p>
                   </a:txBody>
                   <a:tcPr anchor="ctr">
@@ -9913,6 +9983,257 @@
                 <a:extLst>
                   <a:ext uri="{0D108BD9-81ED-4DB2-BD59-A6C34878D82A}">
                     <a16:rowId xmlns:a16="http://schemas.microsoft.com/office/drawing/2014/main" val="1214303278"/>
+                  </a:ext>
+                </a:extLst>
+              </a:tr>
+              <a:tr h="0">
+                <a:tc>
+                  <a:txBody>
+                    <a:bodyPr/>
+                    <a:lstStyle/>
+                    <a:p>
+                      <a:pPr fontAlgn="ctr">
+                        <a:buNone/>
+                      </a:pPr>
+                      <a:r>
+                        <a:rPr lang="en-US" sz="1050" b="1" dirty="0">
+                          <a:effectLst/>
+                          <a:latin typeface="Calibri" panose="020F0502020204030204" pitchFamily="34" charset="0"/>
+                          <a:ea typeface="Calibri" panose="020F0502020204030204" pitchFamily="34" charset="0"/>
+                          <a:cs typeface="Calibri" panose="020F0502020204030204" pitchFamily="34" charset="0"/>
+                        </a:rPr>
+                        <a:t>I</a:t>
+                      </a:r>
+                    </a:p>
+                  </a:txBody>
+                  <a:tcPr anchor="ctr">
+                    <a:lnL w="9525" cap="flat" cmpd="sng" algn="ctr">
+                      <a:solidFill>
+                        <a:srgbClr val="BFBFBF"/>
+                      </a:solidFill>
+                      <a:prstDash val="solid"/>
+                      <a:round/>
+                      <a:headEnd type="none" w="med" len="med"/>
+                      <a:tailEnd type="none" w="med" len="med"/>
+                    </a:lnL>
+                    <a:lnR w="9525" cap="flat" cmpd="sng" algn="ctr">
+                      <a:solidFill>
+                        <a:srgbClr val="BFBFBF"/>
+                      </a:solidFill>
+                      <a:prstDash val="solid"/>
+                      <a:round/>
+                      <a:headEnd type="none" w="med" len="med"/>
+                      <a:tailEnd type="none" w="med" len="med"/>
+                    </a:lnR>
+                    <a:lnT w="9525" cap="flat" cmpd="sng" algn="ctr">
+                      <a:solidFill>
+                        <a:srgbClr val="BFBFBF"/>
+                      </a:solidFill>
+                      <a:prstDash val="solid"/>
+                      <a:round/>
+                      <a:headEnd type="none" w="med" len="med"/>
+                      <a:tailEnd type="none" w="med" len="med"/>
+                    </a:lnT>
+                    <a:lnB w="9525" cap="flat" cmpd="sng" algn="ctr">
+                      <a:solidFill>
+                        <a:srgbClr val="BFBFBF"/>
+                      </a:solidFill>
+                      <a:prstDash val="solid"/>
+                      <a:round/>
+                      <a:headEnd type="none" w="med" len="med"/>
+                      <a:tailEnd type="none" w="med" len="med"/>
+                    </a:lnB>
+                    <a:solidFill>
+                      <a:srgbClr val="FFFFFF"/>
+                    </a:solidFill>
+                  </a:tcPr>
+                </a:tc>
+                <a:tc>
+                  <a:txBody>
+                    <a:bodyPr/>
+                    <a:lstStyle/>
+                    <a:p>
+                      <a:pPr fontAlgn="t">
+                        <a:buNone/>
+                      </a:pPr>
+                      <a:r>
+                        <a:rPr lang="en-US" sz="1050" dirty="0">
+                          <a:effectLst/>
+                          <a:latin typeface="Calibri" panose="020F0502020204030204" pitchFamily="34" charset="0"/>
+                          <a:ea typeface="Calibri" panose="020F0502020204030204" pitchFamily="34" charset="0"/>
+                          <a:cs typeface="Calibri" panose="020F0502020204030204" pitchFamily="34" charset="0"/>
+                        </a:rPr>
+                        <a:t>$I_T</a:t>
+                      </a:r>
+                    </a:p>
+                  </a:txBody>
+                  <a:tcPr>
+                    <a:lnL w="9525" cap="flat" cmpd="sng" algn="ctr">
+                      <a:solidFill>
+                        <a:srgbClr val="BFBFBF"/>
+                      </a:solidFill>
+                      <a:prstDash val="solid"/>
+                      <a:round/>
+                      <a:headEnd type="none" w="med" len="med"/>
+                      <a:tailEnd type="none" w="med" len="med"/>
+                    </a:lnL>
+                    <a:lnR w="9525" cap="flat" cmpd="sng" algn="ctr">
+                      <a:solidFill>
+                        <a:srgbClr val="BFBFBF"/>
+                      </a:solidFill>
+                      <a:prstDash val="solid"/>
+                      <a:round/>
+                      <a:headEnd type="none" w="med" len="med"/>
+                      <a:tailEnd type="none" w="med" len="med"/>
+                    </a:lnR>
+                    <a:lnT w="9525" cap="flat" cmpd="sng" algn="ctr">
+                      <a:solidFill>
+                        <a:srgbClr val="BFBFBF"/>
+                      </a:solidFill>
+                      <a:prstDash val="solid"/>
+                      <a:round/>
+                      <a:headEnd type="none" w="med" len="med"/>
+                      <a:tailEnd type="none" w="med" len="med"/>
+                    </a:lnT>
+                    <a:lnB w="9525" cap="flat" cmpd="sng" algn="ctr">
+                      <a:solidFill>
+                        <a:srgbClr val="BFBFBF"/>
+                      </a:solidFill>
+                      <a:prstDash val="solid"/>
+                      <a:round/>
+                      <a:headEnd type="none" w="med" len="med"/>
+                      <a:tailEnd type="none" w="med" len="med"/>
+                    </a:lnB>
+                    <a:solidFill>
+                      <a:srgbClr val="FFFFFF"/>
+                    </a:solidFill>
+                  </a:tcPr>
+                </a:tc>
+                <a:tc>
+                  <a:txBody>
+                    <a:bodyPr/>
+                    <a:lstStyle/>
+                    <a:p>
+                      <a:pPr fontAlgn="t">
+                        <a:buNone/>
+                      </a:pPr>
+                      <a:r>
+                        <a:rPr lang="en-US" sz="1050" dirty="0">
+                          <a:effectLst/>
+                          <a:latin typeface="Calibri" panose="020F0502020204030204" pitchFamily="34" charset="0"/>
+                          <a:ea typeface="Calibri" panose="020F0502020204030204" pitchFamily="34" charset="0"/>
+                          <a:cs typeface="Calibri" panose="020F0502020204030204" pitchFamily="34" charset="0"/>
+                        </a:rPr>
+                        <a:t>$I_O</a:t>
+                      </a:r>
+                    </a:p>
+                  </a:txBody>
+                  <a:tcPr>
+                    <a:lnL w="9525" cap="flat" cmpd="sng" algn="ctr">
+                      <a:solidFill>
+                        <a:srgbClr val="BFBFBF"/>
+                      </a:solidFill>
+                      <a:prstDash val="solid"/>
+                      <a:round/>
+                      <a:headEnd type="none" w="med" len="med"/>
+                      <a:tailEnd type="none" w="med" len="med"/>
+                    </a:lnL>
+                    <a:lnR w="9525" cap="flat" cmpd="sng" algn="ctr">
+                      <a:solidFill>
+                        <a:srgbClr val="BFBFBF"/>
+                      </a:solidFill>
+                      <a:prstDash val="solid"/>
+                      <a:round/>
+                      <a:headEnd type="none" w="med" len="med"/>
+                      <a:tailEnd type="none" w="med" len="med"/>
+                    </a:lnR>
+                    <a:lnT w="9525" cap="flat" cmpd="sng" algn="ctr">
+                      <a:solidFill>
+                        <a:srgbClr val="BFBFBF"/>
+                      </a:solidFill>
+                      <a:prstDash val="solid"/>
+                      <a:round/>
+                      <a:headEnd type="none" w="med" len="med"/>
+                      <a:tailEnd type="none" w="med" len="med"/>
+                    </a:lnT>
+                    <a:lnB w="9525" cap="flat" cmpd="sng" algn="ctr">
+                      <a:solidFill>
+                        <a:srgbClr val="BFBFBF"/>
+                      </a:solidFill>
+                      <a:prstDash val="solid"/>
+                      <a:round/>
+                      <a:headEnd type="none" w="med" len="med"/>
+                      <a:tailEnd type="none" w="med" len="med"/>
+                    </a:lnB>
+                    <a:solidFill>
+                      <a:srgbClr val="FFFFFF"/>
+                    </a:solidFill>
+                  </a:tcPr>
+                </a:tc>
+                <a:tc>
+                  <a:txBody>
+                    <a:bodyPr/>
+                    <a:lstStyle/>
+                    <a:p>
+                      <a:pPr fontAlgn="ctr">
+                        <a:buNone/>
+                      </a:pPr>
+                      <a:r>
+                        <a:rPr lang="en-US" sz="1050" dirty="0">
+                          <a:effectLst/>
+                          <a:latin typeface="Calibri" panose="020F0502020204030204" pitchFamily="34" charset="0"/>
+                          <a:ea typeface="Calibri" panose="020F0502020204030204" pitchFamily="34" charset="0"/>
+                          <a:cs typeface="Calibri" panose="020F0502020204030204" pitchFamily="34" charset="0"/>
+                        </a:rPr>
+                        <a:t>$I_MP</a:t>
+                      </a:r>
+                    </a:p>
+                  </a:txBody>
+                  <a:tcPr anchor="ctr">
+                    <a:lnL w="9525" cap="flat" cmpd="sng" algn="ctr">
+                      <a:solidFill>
+                        <a:srgbClr val="BFBFBF"/>
+                      </a:solidFill>
+                      <a:prstDash val="solid"/>
+                      <a:round/>
+                      <a:headEnd type="none" w="med" len="med"/>
+                      <a:tailEnd type="none" w="med" len="med"/>
+                    </a:lnL>
+                    <a:lnR w="9525" cap="flat" cmpd="sng" algn="ctr">
+                      <a:solidFill>
+                        <a:srgbClr val="BFBFBF"/>
+                      </a:solidFill>
+                      <a:prstDash val="solid"/>
+                      <a:round/>
+                      <a:headEnd type="none" w="med" len="med"/>
+                      <a:tailEnd type="none" w="med" len="med"/>
+                    </a:lnR>
+                    <a:lnT w="9525" cap="flat" cmpd="sng" algn="ctr">
+                      <a:solidFill>
+                        <a:srgbClr val="BFBFBF"/>
+                      </a:solidFill>
+                      <a:prstDash val="solid"/>
+                      <a:round/>
+                      <a:headEnd type="none" w="med" len="med"/>
+                      <a:tailEnd type="none" w="med" len="med"/>
+                    </a:lnT>
+                    <a:lnB w="9525" cap="flat" cmpd="sng" algn="ctr">
+                      <a:solidFill>
+                        <a:srgbClr val="BFBFBF"/>
+                      </a:solidFill>
+                      <a:prstDash val="solid"/>
+                      <a:round/>
+                      <a:headEnd type="none" w="med" len="med"/>
+                      <a:tailEnd type="none" w="med" len="med"/>
+                    </a:lnB>
+                    <a:solidFill>
+                      <a:srgbClr val="FFFFFF"/>
+                    </a:solidFill>
+                  </a:tcPr>
+                </a:tc>
+                <a:extLst>
+                  <a:ext uri="{0D108BD9-81ED-4DB2-BD59-A6C34878D82A}">
+                    <a16:rowId xmlns:a16="http://schemas.microsoft.com/office/drawing/2014/main" val="1528594153"/>
                   </a:ext>
                 </a:extLst>
               </a:tr>
@@ -10382,7 +10703,7 @@
         </p:nvSpPr>
         <p:spPr>
           <a:xfrm>
-            <a:off x="10596595" y="631979"/>
+            <a:off x="10596595" y="622251"/>
             <a:ext cx="1209607" cy="160925"/>
           </a:xfrm>
           <a:prstGeom prst="rect">

--- a/WSR-Template.pptx
+++ b/WSR-Template.pptx
@@ -251,7 +251,7 @@
           <a:p>
             <a:fld id="{846CE7D5-CF57-46EF-B807-FDD0502418D4}" type="datetimeFigureOut">
               <a:rPr lang="en-US" smtClean="0"/>
-              <a:t>6/19/2026</a:t>
+              <a:t>6/23/2026</a:t>
             </a:fld>
             <a:endParaRPr lang="en-US"/>
           </a:p>
@@ -421,7 +421,7 @@
           <a:p>
             <a:fld id="{846CE7D5-CF57-46EF-B807-FDD0502418D4}" type="datetimeFigureOut">
               <a:rPr lang="en-US" smtClean="0"/>
-              <a:t>6/19/2026</a:t>
+              <a:t>6/23/2026</a:t>
             </a:fld>
             <a:endParaRPr lang="en-US"/>
           </a:p>
@@ -601,7 +601,7 @@
           <a:p>
             <a:fld id="{846CE7D5-CF57-46EF-B807-FDD0502418D4}" type="datetimeFigureOut">
               <a:rPr lang="en-US" smtClean="0"/>
-              <a:t>6/19/2026</a:t>
+              <a:t>6/23/2026</a:t>
             </a:fld>
             <a:endParaRPr lang="en-US"/>
           </a:p>
@@ -771,7 +771,7 @@
           <a:p>
             <a:fld id="{846CE7D5-CF57-46EF-B807-FDD0502418D4}" type="datetimeFigureOut">
               <a:rPr lang="en-US" smtClean="0"/>
-              <a:t>6/19/2026</a:t>
+              <a:t>6/23/2026</a:t>
             </a:fld>
             <a:endParaRPr lang="en-US"/>
           </a:p>
@@ -1017,7 +1017,7 @@
           <a:p>
             <a:fld id="{846CE7D5-CF57-46EF-B807-FDD0502418D4}" type="datetimeFigureOut">
               <a:rPr lang="en-US" smtClean="0"/>
-              <a:t>6/19/2026</a:t>
+              <a:t>6/23/2026</a:t>
             </a:fld>
             <a:endParaRPr lang="en-US"/>
           </a:p>
@@ -1249,7 +1249,7 @@
           <a:p>
             <a:fld id="{846CE7D5-CF57-46EF-B807-FDD0502418D4}" type="datetimeFigureOut">
               <a:rPr lang="en-US" smtClean="0"/>
-              <a:t>6/19/2026</a:t>
+              <a:t>6/23/2026</a:t>
             </a:fld>
             <a:endParaRPr lang="en-US"/>
           </a:p>
@@ -1616,7 +1616,7 @@
           <a:p>
             <a:fld id="{846CE7D5-CF57-46EF-B807-FDD0502418D4}" type="datetimeFigureOut">
               <a:rPr lang="en-US" smtClean="0"/>
-              <a:t>6/19/2026</a:t>
+              <a:t>6/23/2026</a:t>
             </a:fld>
             <a:endParaRPr lang="en-US"/>
           </a:p>
@@ -1734,7 +1734,7 @@
           <a:p>
             <a:fld id="{846CE7D5-CF57-46EF-B807-FDD0502418D4}" type="datetimeFigureOut">
               <a:rPr lang="en-US" smtClean="0"/>
-              <a:t>6/19/2026</a:t>
+              <a:t>6/23/2026</a:t>
             </a:fld>
             <a:endParaRPr lang="en-US"/>
           </a:p>
@@ -1829,7 +1829,7 @@
           <a:p>
             <a:fld id="{846CE7D5-CF57-46EF-B807-FDD0502418D4}" type="datetimeFigureOut">
               <a:rPr lang="en-US" smtClean="0"/>
-              <a:t>6/19/2026</a:t>
+              <a:t>6/23/2026</a:t>
             </a:fld>
             <a:endParaRPr lang="en-US"/>
           </a:p>
@@ -2106,7 +2106,7 @@
           <a:p>
             <a:fld id="{846CE7D5-CF57-46EF-B807-FDD0502418D4}" type="datetimeFigureOut">
               <a:rPr lang="en-US" smtClean="0"/>
-              <a:t>6/19/2026</a:t>
+              <a:t>6/23/2026</a:t>
             </a:fld>
             <a:endParaRPr lang="en-US"/>
           </a:p>
@@ -2363,7 +2363,7 @@
           <a:p>
             <a:fld id="{846CE7D5-CF57-46EF-B807-FDD0502418D4}" type="datetimeFigureOut">
               <a:rPr lang="en-US" smtClean="0"/>
-              <a:t>6/19/2026</a:t>
+              <a:t>6/23/2026</a:t>
             </a:fld>
             <a:endParaRPr lang="en-US"/>
           </a:p>
@@ -2576,7 +2576,7 @@
           <a:p>
             <a:fld id="{846CE7D5-CF57-46EF-B807-FDD0502418D4}" type="datetimeFigureOut">
               <a:rPr lang="en-US" smtClean="0"/>
-              <a:t>6/19/2026</a:t>
+              <a:t>6/23/2026</a:t>
             </a:fld>
             <a:endParaRPr lang="en-US"/>
           </a:p>
@@ -3365,8 +3365,8 @@
         </p:nvSpPr>
         <p:spPr>
           <a:xfrm>
-            <a:off x="382947" y="3945763"/>
-            <a:ext cx="6401475" cy="1383221"/>
+            <a:off x="382947" y="4246787"/>
+            <a:ext cx="6401475" cy="1082197"/>
           </a:xfrm>
           <a:prstGeom prst="rect">
             <a:avLst/>
@@ -5999,7 +5999,7 @@
           <p:nvPr>
             <p:extLst>
               <p:ext uri="{D42A27DB-BD31-4B8C-83A1-F6EECF244321}">
-                <p14:modId xmlns:p14="http://schemas.microsoft.com/office/powerpoint/2010/main" val="324432429"/>
+                <p14:modId xmlns:p14="http://schemas.microsoft.com/office/powerpoint/2010/main" val="2640885410"/>
               </p:ext>
             </p:extLst>
           </p:nvPr>
@@ -6178,7 +6178,7 @@
                           <a:effectLst/>
                           <a:latin typeface="Calibri" panose="020F0502020204030204" pitchFamily="34" charset="0"/>
                         </a:rPr>
-                        <a:t>$SPRINT_N1</a:t>
+                        <a:t>$SPRINT_1N</a:t>
                       </a:r>
                       <a:endParaRPr lang="en-US" b="0" i="0" dirty="0">
                         <a:solidFill>
@@ -6249,7 +6249,7 @@
                           <a:effectLst/>
                           <a:latin typeface="Calibri" panose="020F0502020204030204" pitchFamily="34" charset="0"/>
                         </a:rPr>
-                        <a:t>$SPRINT_N2</a:t>
+                        <a:t>$SPRINT_2N</a:t>
                       </a:r>
                       <a:endParaRPr lang="en-US" b="0" i="0" dirty="0">
                         <a:solidFill>

--- a/WSR-Template.pptx
+++ b/WSR-Template.pptx
@@ -3353,7 +3353,7 @@
       </p:sp>
       <p:sp>
         <p:nvSpPr>
-          <p:cNvPr id="21" name="Rectangle 20">
+          <p:cNvPr id="21" name="Rectangle 20" descr="Achievement Section">
             <a:extLst>
               <a:ext uri="{FF2B5EF4-FFF2-40B4-BE49-F238E27FC236}">
                 <a16:creationId xmlns:a16="http://schemas.microsoft.com/office/drawing/2014/main" id="{9119E9F6-60CA-3D2F-AC11-853018AFFDA3}"/>
@@ -5999,7 +5999,7 @@
           <p:nvPr>
             <p:extLst>
               <p:ext uri="{D42A27DB-BD31-4B8C-83A1-F6EECF244321}">
-                <p14:modId xmlns:p14="http://schemas.microsoft.com/office/powerpoint/2010/main" val="2640885410"/>
+                <p14:modId xmlns:p14="http://schemas.microsoft.com/office/powerpoint/2010/main" val="1761645185"/>
               </p:ext>
             </p:extLst>
           </p:nvPr>
@@ -8365,7 +8365,7 @@
                           <a:ea typeface="Calibri" panose="020F0502020204030204" pitchFamily="34" charset="0"/>
                           <a:cs typeface="Calibri" panose="020F0502020204030204" pitchFamily="34" charset="0"/>
                         </a:rPr>
-                        <a:t>$N1_SUSF</a:t>
+                        <a:t>$N1_SUS</a:t>
                       </a:r>
                     </a:p>
                   </a:txBody>
@@ -8432,29 +8432,8 @@
                           <a:ea typeface="Calibri" panose="020F0502020204030204" pitchFamily="34" charset="0"/>
                           <a:cs typeface="Calibri" panose="020F0502020204030204" pitchFamily="34" charset="0"/>
                         </a:rPr>
-                        <a:t>$</a:t>
+                        <a:t>$N2_SUS</a:t>
                       </a:r>
-                      <a:r>
-                        <a:rPr lang="en-US" sz="1050" b="0" i="0" u="none" strike="noStrike">
-                          <a:solidFill>
-                            <a:srgbClr val="000000"/>
-                          </a:solidFill>
-                          <a:effectLst/>
-                          <a:latin typeface="Calibri" panose="020F0502020204030204" pitchFamily="34" charset="0"/>
-                          <a:ea typeface="Calibri" panose="020F0502020204030204" pitchFamily="34" charset="0"/>
-                          <a:cs typeface="Calibri" panose="020F0502020204030204" pitchFamily="34" charset="0"/>
-                        </a:rPr>
-                        <a:t>N2_SUSF</a:t>
-                      </a:r>
-                      <a:endParaRPr lang="en-US" sz="1050" b="0" i="0" u="none" strike="noStrike" dirty="0">
-                        <a:solidFill>
-                          <a:srgbClr val="000000"/>
-                        </a:solidFill>
-                        <a:effectLst/>
-                        <a:latin typeface="Calibri" panose="020F0502020204030204" pitchFamily="34" charset="0"/>
-                        <a:ea typeface="Calibri" panose="020F0502020204030204" pitchFamily="34" charset="0"/>
-                        <a:cs typeface="Calibri" panose="020F0502020204030204" pitchFamily="34" charset="0"/>
-                      </a:endParaRPr>
                     </a:p>
                   </a:txBody>
                   <a:tcPr marL="6343" marR="6343" marT="6343" anchor="ctr">
@@ -8518,7 +8497,7 @@
                         <a:buNone/>
                       </a:pPr>
                       <a:r>
-                        <a:rPr lang="en-US" sz="1050" b="0" i="0">
+                        <a:rPr lang="en-US" sz="1050" b="0" i="0" dirty="0">
                           <a:solidFill>
                             <a:srgbClr val="000000"/>
                           </a:solidFill>
@@ -8527,7 +8506,7 @@
                         </a:rPr>
                         <a:t>Code Commits</a:t>
                       </a:r>
-                      <a:endParaRPr lang="en-US" b="0" i="0">
+                      <a:endParaRPr lang="en-US" b="0" i="0" dirty="0">
                         <a:solidFill>
                           <a:srgbClr val="000000"/>
                         </a:solidFill>
